--- a/reports/SupplyAI-RL_Final_Project_Review.pptx
+++ b/reports/SupplyAI-RL_Final_Project_Review.pptx
@@ -40,10 +40,6 @@
     <p:sldId id="332" r:id="rId48"/>
     <p:sldId id="333" r:id="rId49"/>
     <p:sldId id="334" r:id="rId50"/>
-    <p:sldId id="335" r:id="rId51"/>
-    <p:sldId id="336" r:id="rId52"/>
-    <p:sldId id="337" r:id="rId53"/>
-    <p:sldId id="338" r:id="rId54"/>
   </p:sldIdLst>
   <p:sldSz cx="12192000" cy="6858000"/>
   <p:notesSz cx="6858000" cy="9144000"/>
@@ -1318,7 +1314,7 @@
           <a:lstStyle/>
           <a:p>
             <a:r>
-              <a:t>The loop: state in, action out, reward back. Action masking is the biggest single improvement: it stops the agent wasting training on choices that are never legal.</a:t>
+              <a:t>If asked for detail: the simulator runs five steps a day (deliveries, customers, sales, orders, profit), with storage at 0.15% of cost per day, leftover stock worth 60% of cost, and one shared 20,000-unit warehouse. The agent sees 88 numbers and picks one of 21 options per product; the winning settings were learning rate 5e-5, entropy 0.005, gamma 0.995, rollout 1024, network 2 x 256, from an 8-configuration search with the best two run to 2M steps. The loop: state in, action out, reward back. Action masking is the biggest single improvement: it stops the agent wasting training on choices that are never legal.</a:t>
             </a:r>
           </a:p>
         </p:txBody>
@@ -1528,7 +1524,7 @@
           <a:lstStyle/>
           <a:p>
             <a:r>
-              <a:t>A Gymnasium environment. The three cards are three mistakes in earlier versions that we fixed after the simulator itself told us something was wrong. A demo confirms the simulator rewards sensible behaviour: reasonable rules earn about 27 lakh, never ordering loses 3.9 crore.</a:t>
+              <a:t>This is what makes a negative result meaningful. Three disjoint seed groups, tuned baselines, identical customers for every method.</a:t>
             </a:r>
           </a:p>
         </p:txBody>
@@ -1598,7 +1594,7 @@
           <a:lstStyle/>
           <a:p>
             <a:r>
-              <a:t>MaskablePPO is PPO with action masking. The agent's inputs include nothing about its own ordering history, which turns out to be the cause of its main weakness.</a:t>
+              <a:t>The key design decision: the LLM only presents facts the simulator computed. Then every number in its output is checked against those facts. If it invented one, a fixed template is shown instead. Three free models via OpenRouter, tried in order, with retries.</a:t>
             </a:r>
           </a:p>
         </p:txBody>
@@ -1668,7 +1664,7 @@
           <a:lstStyle/>
           <a:p>
             <a:r>
-              <a:t>This is what makes a negative result meaningful. Three disjoint seed groups, tuned baselines, identical customers for every method.</a:t>
+              <a:t>The LLM's value here is imagination, not trust. We validate everything. The curriculum experiment is controlled: same seed, same settings, same steps.</a:t>
             </a:r>
           </a:p>
         </p:txBody>
@@ -1738,7 +1734,7 @@
           <a:lstStyle/>
           <a:p>
             <a:r>
-              <a:t>The key design decision: the LLM only presents facts the simulator computed. Then every number in its output is checked against those facts. If it invented one, a fixed template is shown instead. Three free models via OpenRouter, tried in order, with retries.</a:t>
+              <a:t>Live demo starting point. The dashboard opens on the engine, the policy a buyer would actually run. Everything shown comes from a real episode run on demand; no number on the page is typed in.</a:t>
             </a:r>
           </a:p>
         </p:txBody>
@@ -1808,7 +1804,7 @@
           <a:lstStyle/>
           <a:p>
             <a:r>
-              <a:t>The LLM's value here is imagination, not trust. We validate everything. The curriculum experiment is controlled: same seed, same settings, same steps.</a:t>
+              <a:t>Left: switch the policy to the challenger and the supplier bars change completely. This is the visual evidence for the error analysis. Right: the crisis switch injects the LLM-written disruption for the whole run.</a:t>
             </a:r>
           </a:p>
         </p:txBody>
@@ -1878,7 +1874,7 @@
           <a:lstStyle/>
           <a:p>
             <a:r>
-              <a:t>Live demo starting point. The dashboard opens on the engine, the policy a buyer would actually run. Everything shown comes from a real episode run on demand; no number on the page is typed in.</a:t>
+              <a:t>Before = the shop orders the same fixed amount every day, tuned as carefully as every other baseline. After = the system's engine. Same 30 unseen runs. The honest reading: forecasting plus safety stock does the heavy lifting; the RL challenger also beats the fixed order but trails the engine.</a:t>
             </a:r>
           </a:p>
         </p:txBody>
@@ -1948,7 +1944,7 @@
           <a:lstStyle/>
           <a:p>
             <a:r>
-              <a:t>Left: switch the policy to the challenger and the supplier bars change completely. This is the visual evidence for the error analysis. Right: the crisis switch injects the LLM-written disruption for the whole run.</a:t>
+              <a:t>This is the explainer in action, live. The explanation is a restatement of computed facts, not an account of the neural network's reasoning, and we say so explicitly.</a:t>
             </a:r>
           </a:p>
         </p:txBody>
@@ -2018,7 +2014,7 @@
           <a:lstStyle/>
           <a:p>
             <a:r>
-              <a:t>Before = the shop orders the same fixed amount every day, tuned as carefully as every other baseline. After = the system's engine. Same 30 unseen runs. The honest reading: forecasting plus safety stock does the heavy lifting; the RL challenger also beats the fixed order but trails the engine.</a:t>
+              <a:t>Both tabs read the saved result files, so the dashboard cannot disagree with the report.</a:t>
             </a:r>
           </a:p>
         </p:txBody>
@@ -2088,7 +2084,7 @@
           <a:lstStyle/>
           <a:p>
             <a:r>
-              <a:t>Every dot is one test seed, sorted by the before profit. The point of this chart is that the improvement is consistent, not an average hiding losses.</a:t>
+              <a:t>State the result plainly: the classical engine wins by about 8 lakh per run, paired t of minus 6.45. The agent reaches 90.8% of its profit and beats EOQ and (s,S). The constant-order row is the 'no system' baseline.</a:t>
             </a:r>
           </a:p>
         </p:txBody>
@@ -2158,7 +2154,7 @@
           <a:lstStyle/>
           <a:p>
             <a:r>
-              <a:t>Live demo option: flip the crisis switch in the sidebar and watch both charts redraw for all three policies.</a:t>
+              <a:t>Two controlled improvements, each measured: masking about 3x, tuning closes 38% of the remaining gap. The curves show learning progress on the checkpoint-selection seeds; reported scores come from separate held-out seeds.</a:t>
             </a:r>
           </a:p>
         </p:txBody>
@@ -2228,7 +2224,7 @@
           <a:lstStyle/>
           <a:p>
             <a:r>
-              <a:t>This is the explainer in action, live. The explanation is a restatement of computed facts, not an account of the neural network's reasoning, and we say so explicitly.</a:t>
+              <a:t>Every method loses more than a third of its profit in a crisis; RL is not more adaptive than the tuned classical method. Our attempt to fix that with crisis training did not work. We report it as a negative result.</a:t>
             </a:r>
           </a:p>
         </p:txBody>
@@ -2298,7 +2294,7 @@
           <a:lstStyle/>
           <a:p>
             <a:r>
-              <a:t>Both tabs read the saved result files, so the dashboard cannot disagree with the report.</a:t>
+              <a:t>Be upfront about both numbers. 83% is the model by itself; 100% is the system with the check. The finding is that the check is essential, not decoration.</a:t>
             </a:r>
           </a:p>
         </p:txBody>
@@ -2368,7 +2364,7 @@
           <a:lstStyle/>
           <a:p>
             <a:r>
-              <a:t>State the result plainly: the classical engine wins by about 8 lakh per run, paired t of minus 6.45. The agent reaches 90.8% of its profit and beats EOQ and (s,S). The constant-order row is the 'no system' baseline.</a:t>
+              <a:t>We know why it loses. It cannot observe its own ordering history, so it cannot learn to stop fragmenting orders. This is a limit on what it observes, not a tuning problem. We have not yet tested the fix.</a:t>
             </a:r>
           </a:p>
         </p:txBody>
@@ -2438,7 +2434,7 @@
           <a:lstStyle/>
           <a:p>
             <a:r>
-              <a:t>Two controlled improvements, each measured: masking about 3x, tuning closes 38% of the remaining gap. The curves show learning progress on the checkpoint-selection seeds; reported scores come from separate held-out seeds.</a:t>
+              <a:t>Evidence that the work is real and reproducible. 137 tests: 135 run offline; 2 call the live LLM and are skipped without a key. The repository is public on GitHub: KJSK-Koushik/Supply-AI-RL-Explainable-supply-chain-Optimisation.</a:t>
             </a:r>
           </a:p>
         </p:txBody>
@@ -2508,7 +2504,7 @@
           <a:lstStyle/>
           <a:p>
             <a:r>
-              <a:t>Every method loses more than a third of its profit in a crisis; RL is not more adaptive than the tuned classical method. Our attempt to fix that with crisis training did not work. We report it as a negative result.</a:t>
+              <a:t>Listed in descending order of how much they should change a reader's confidence. The first two are the biggest: the data is old and the suppliers are invented.</a:t>
             </a:r>
           </a:p>
         </p:txBody>
@@ -2578,7 +2574,7 @@
           <a:lstStyle/>
           <a:p>
             <a:r>
-              <a:t>Be upfront about both numbers. 83% is the model by itself; 100% is the system with the check. The finding is that the check is essential, not decoration.</a:t>
+              <a:t>Close on the honest claim: the project works end to end, the comparison is fair, the classical method wins, and we know why. The next experiment is aimed straight at the cause.</a:t>
             </a:r>
           </a:p>
         </p:txBody>
@@ -2648,7 +2644,7 @@
           <a:lstStyle/>
           <a:p>
             <a:r>
-              <a:t>We know why it loses. It cannot observe its own ordering history, so it cannot learn to stop fragmenting orders. This is a limit on what it observes, not a tuning problem. We have not yet tested the fix.</a:t>
+              <a:t>Same eight references as the report. The report has the full paper; this is the short list.</a:t>
             </a:r>
           </a:p>
         </p:txBody>
@@ -2674,286 +2670,6 @@
 </file>
 
 <file path=ppt/notesSlides/notesSlide43.xml><?xml version="1.0" encoding="utf-8"?>
-<p:notes xmlns:a="http://schemas.openxmlformats.org/drawingml/2006/main" xmlns:p="http://schemas.openxmlformats.org/presentationml/2006/main" xmlns:r="http://schemas.openxmlformats.org/officeDocument/2006/relationships">
-  <p:cSld>
-    <p:spTree>
-      <p:nvGrpSpPr>
-        <p:cNvPr id="1" name=""/>
-        <p:cNvGrpSpPr/>
-        <p:nvPr/>
-      </p:nvGrpSpPr>
-      <p:grpSpPr>
-        <a:xfrm>
-          <a:off x="0" y="0"/>
-          <a:ext cx="0" cy="0"/>
-          <a:chOff x="0" y="0"/>
-          <a:chExt cx="0" cy="0"/>
-        </a:xfrm>
-      </p:grpSpPr>
-      <p:sp>
-        <p:nvSpPr>
-          <p:cNvPr id="2" name="Slide Image Placeholder 1"/>
-          <p:cNvSpPr>
-            <a:spLocks noGrp="1"/>
-          </p:cNvSpPr>
-          <p:nvPr>
-            <p:ph type="sldImg" idx="2"/>
-          </p:nvPr>
-        </p:nvSpPr>
-        <p:spPr/>
-      </p:sp>
-      <p:sp>
-        <p:nvSpPr>
-          <p:cNvPr id="3" name="Notes Placeholder 2"/>
-          <p:cNvSpPr>
-            <a:spLocks noGrp="1"/>
-          </p:cNvSpPr>
-          <p:nvPr>
-            <p:ph type="body" idx="3" sz="quarter"/>
-          </p:nvPr>
-        </p:nvSpPr>
-        <p:spPr/>
-        <p:txBody>
-          <a:bodyPr/>
-          <a:lstStyle/>
-          <a:p>
-            <a:r>
-              <a:t>Evidence that the work is real and reproducible. 137 tests: 135 run offline; 2 call the live LLM and are skipped without a key. The repository is public on GitHub: KJSK-Koushik/Supply-AI-RL-Explainable-supply-chain-Optimisation.</a:t>
-            </a:r>
-          </a:p>
-        </p:txBody>
-      </p:sp>
-      <p:sp>
-        <p:nvSpPr>
-          <p:cNvPr id="4" name="Slide Number Placeholder 3"/>
-          <p:cNvSpPr>
-            <a:spLocks noGrp="1"/>
-          </p:cNvSpPr>
-          <p:nvPr>
-            <p:ph type="sldNum" idx="5" sz="quarter"/>
-          </p:nvPr>
-        </p:nvSpPr>
-        <p:spPr/>
-      </p:sp>
-    </p:spTree>
-  </p:cSld>
-  <p:clrMapOvr>
-    <a:masterClrMapping/>
-  </p:clrMapOvr>
-</p:notes>
-</file>
-
-<file path=ppt/notesSlides/notesSlide44.xml><?xml version="1.0" encoding="utf-8"?>
-<p:notes xmlns:a="http://schemas.openxmlformats.org/drawingml/2006/main" xmlns:p="http://schemas.openxmlformats.org/presentationml/2006/main" xmlns:r="http://schemas.openxmlformats.org/officeDocument/2006/relationships">
-  <p:cSld>
-    <p:spTree>
-      <p:nvGrpSpPr>
-        <p:cNvPr id="1" name=""/>
-        <p:cNvGrpSpPr/>
-        <p:nvPr/>
-      </p:nvGrpSpPr>
-      <p:grpSpPr>
-        <a:xfrm>
-          <a:off x="0" y="0"/>
-          <a:ext cx="0" cy="0"/>
-          <a:chOff x="0" y="0"/>
-          <a:chExt cx="0" cy="0"/>
-        </a:xfrm>
-      </p:grpSpPr>
-      <p:sp>
-        <p:nvSpPr>
-          <p:cNvPr id="2" name="Slide Image Placeholder 1"/>
-          <p:cNvSpPr>
-            <a:spLocks noGrp="1"/>
-          </p:cNvSpPr>
-          <p:nvPr>
-            <p:ph type="sldImg" idx="2"/>
-          </p:nvPr>
-        </p:nvSpPr>
-        <p:spPr/>
-      </p:sp>
-      <p:sp>
-        <p:nvSpPr>
-          <p:cNvPr id="3" name="Notes Placeholder 2"/>
-          <p:cNvSpPr>
-            <a:spLocks noGrp="1"/>
-          </p:cNvSpPr>
-          <p:nvPr>
-            <p:ph type="body" idx="3" sz="quarter"/>
-          </p:nvPr>
-        </p:nvSpPr>
-        <p:spPr/>
-        <p:txBody>
-          <a:bodyPr/>
-          <a:lstStyle/>
-          <a:p>
-            <a:r>
-              <a:t>Listed in descending order of how much they should change a reader's confidence. The first two are the biggest: the data is old and the suppliers are invented.</a:t>
-            </a:r>
-          </a:p>
-        </p:txBody>
-      </p:sp>
-      <p:sp>
-        <p:nvSpPr>
-          <p:cNvPr id="4" name="Slide Number Placeholder 3"/>
-          <p:cNvSpPr>
-            <a:spLocks noGrp="1"/>
-          </p:cNvSpPr>
-          <p:nvPr>
-            <p:ph type="sldNum" idx="5" sz="quarter"/>
-          </p:nvPr>
-        </p:nvSpPr>
-        <p:spPr/>
-      </p:sp>
-    </p:spTree>
-  </p:cSld>
-  <p:clrMapOvr>
-    <a:masterClrMapping/>
-  </p:clrMapOvr>
-</p:notes>
-</file>
-
-<file path=ppt/notesSlides/notesSlide45.xml><?xml version="1.0" encoding="utf-8"?>
-<p:notes xmlns:a="http://schemas.openxmlformats.org/drawingml/2006/main" xmlns:p="http://schemas.openxmlformats.org/presentationml/2006/main" xmlns:r="http://schemas.openxmlformats.org/officeDocument/2006/relationships">
-  <p:cSld>
-    <p:spTree>
-      <p:nvGrpSpPr>
-        <p:cNvPr id="1" name=""/>
-        <p:cNvGrpSpPr/>
-        <p:nvPr/>
-      </p:nvGrpSpPr>
-      <p:grpSpPr>
-        <a:xfrm>
-          <a:off x="0" y="0"/>
-          <a:ext cx="0" cy="0"/>
-          <a:chOff x="0" y="0"/>
-          <a:chExt cx="0" cy="0"/>
-        </a:xfrm>
-      </p:grpSpPr>
-      <p:sp>
-        <p:nvSpPr>
-          <p:cNvPr id="2" name="Slide Image Placeholder 1"/>
-          <p:cNvSpPr>
-            <a:spLocks noGrp="1"/>
-          </p:cNvSpPr>
-          <p:nvPr>
-            <p:ph type="sldImg" idx="2"/>
-          </p:nvPr>
-        </p:nvSpPr>
-        <p:spPr/>
-      </p:sp>
-      <p:sp>
-        <p:nvSpPr>
-          <p:cNvPr id="3" name="Notes Placeholder 2"/>
-          <p:cNvSpPr>
-            <a:spLocks noGrp="1"/>
-          </p:cNvSpPr>
-          <p:nvPr>
-            <p:ph type="body" idx="3" sz="quarter"/>
-          </p:nvPr>
-        </p:nvSpPr>
-        <p:spPr/>
-        <p:txBody>
-          <a:bodyPr/>
-          <a:lstStyle/>
-          <a:p>
-            <a:r>
-              <a:t>Close on the honest claim: the project works end to end, the comparison is fair, the classical method wins, and we know why. The next experiment is aimed straight at the cause.</a:t>
-            </a:r>
-          </a:p>
-        </p:txBody>
-      </p:sp>
-      <p:sp>
-        <p:nvSpPr>
-          <p:cNvPr id="4" name="Slide Number Placeholder 3"/>
-          <p:cNvSpPr>
-            <a:spLocks noGrp="1"/>
-          </p:cNvSpPr>
-          <p:nvPr>
-            <p:ph type="sldNum" idx="5" sz="quarter"/>
-          </p:nvPr>
-        </p:nvSpPr>
-        <p:spPr/>
-      </p:sp>
-    </p:spTree>
-  </p:cSld>
-  <p:clrMapOvr>
-    <a:masterClrMapping/>
-  </p:clrMapOvr>
-</p:notes>
-</file>
-
-<file path=ppt/notesSlides/notesSlide46.xml><?xml version="1.0" encoding="utf-8"?>
-<p:notes xmlns:a="http://schemas.openxmlformats.org/drawingml/2006/main" xmlns:p="http://schemas.openxmlformats.org/presentationml/2006/main" xmlns:r="http://schemas.openxmlformats.org/officeDocument/2006/relationships">
-  <p:cSld>
-    <p:spTree>
-      <p:nvGrpSpPr>
-        <p:cNvPr id="1" name=""/>
-        <p:cNvGrpSpPr/>
-        <p:nvPr/>
-      </p:nvGrpSpPr>
-      <p:grpSpPr>
-        <a:xfrm>
-          <a:off x="0" y="0"/>
-          <a:ext cx="0" cy="0"/>
-          <a:chOff x="0" y="0"/>
-          <a:chExt cx="0" cy="0"/>
-        </a:xfrm>
-      </p:grpSpPr>
-      <p:sp>
-        <p:nvSpPr>
-          <p:cNvPr id="2" name="Slide Image Placeholder 1"/>
-          <p:cNvSpPr>
-            <a:spLocks noGrp="1"/>
-          </p:cNvSpPr>
-          <p:nvPr>
-            <p:ph type="sldImg" idx="2"/>
-          </p:nvPr>
-        </p:nvSpPr>
-        <p:spPr/>
-      </p:sp>
-      <p:sp>
-        <p:nvSpPr>
-          <p:cNvPr id="3" name="Notes Placeholder 2"/>
-          <p:cNvSpPr>
-            <a:spLocks noGrp="1"/>
-          </p:cNvSpPr>
-          <p:nvPr>
-            <p:ph type="body" idx="3" sz="quarter"/>
-          </p:nvPr>
-        </p:nvSpPr>
-        <p:spPr/>
-        <p:txBody>
-          <a:bodyPr/>
-          <a:lstStyle/>
-          <a:p>
-            <a:r>
-              <a:t>Same eight references as the report. The report has the full paper; this is the short list.</a:t>
-            </a:r>
-          </a:p>
-        </p:txBody>
-      </p:sp>
-      <p:sp>
-        <p:nvSpPr>
-          <p:cNvPr id="4" name="Slide Number Placeholder 3"/>
-          <p:cNvSpPr>
-            <a:spLocks noGrp="1"/>
-          </p:cNvSpPr>
-          <p:nvPr>
-            <p:ph type="sldNum" idx="5" sz="quarter"/>
-          </p:nvPr>
-        </p:nvSpPr>
-        <p:spPr/>
-      </p:sp>
-    </p:spTree>
-  </p:cSld>
-  <p:clrMapOvr>
-    <a:masterClrMapping/>
-  </p:clrMapOvr>
-</p:notes>
-</file>
-
-<file path=ppt/notesSlides/notesSlide47.xml><?xml version="1.0" encoding="utf-8"?>
 <p:notes xmlns:a="http://schemas.openxmlformats.org/drawingml/2006/main" xmlns:p="http://schemas.openxmlformats.org/presentationml/2006/main" xmlns:r="http://schemas.openxmlformats.org/officeDocument/2006/relationships">
   <p:cSld>
     <p:spTree>
@@ -7027,7 +6743,7 @@
                 </a:solidFill>
                 <a:latin typeface="Calibri"/>
               </a:rPr>
-              <a:t>6  Methodology: simulator, agent, baselines</a:t>
+              <a:t>6  Methodology: the agent, the baselines</a:t>
             </a:r>
           </a:p>
           <a:p>
@@ -15184,1790 +14900,6 @@
           <a:p>
             <a:r>
               <a:rPr sz="3200"/>
-              <a:t>Methodology: The Simulator</a:t>
-            </a:r>
-          </a:p>
-        </p:txBody>
-      </p:sp>
-      <p:sp>
-        <p:nvSpPr>
-          <p:cNvPr id="19" name="Slide Number Placeholder 18">
-            <a:extLst>
-              <a:ext uri="{FF2B5EF4-FFF2-40B4-BE49-F238E27FC236}">
-                <a16:creationId xmlns:a16="http://schemas.microsoft.com/office/drawing/2014/main" id="{9B6D94B3-8D6F-6862-5C85-C28EA1FEBFFD}"/>
-              </a:ext>
-            </a:extLst>
-          </p:cNvPr>
-          <p:cNvSpPr>
-            <a:spLocks noGrp="1"/>
-          </p:cNvSpPr>
-          <p:nvPr>
-            <p:ph type="sldNum" sz="quarter" idx="12"/>
-          </p:nvPr>
-        </p:nvSpPr>
-        <p:spPr/>
-        <p:txBody>
-          <a:bodyPr/>
-          <a:lstStyle/>
-          <a:p>
-            <a:fld id="{C2216105-7B7A-4C42-B2A1-5E9A2FA4F8FD}" type="slidenum">
-              <a:rPr lang="en-IN" smtClean="0"/>
-              <a:t>3</a:t>
-            </a:fld>
-            <a:endParaRPr lang="en-IN" dirty="0"/>
-          </a:p>
-        </p:txBody>
-      </p:sp>
-      <p:pic>
-        <p:nvPicPr>
-          <p:cNvPr id="20" name="Picture 19" descr="daily_cycle.png"/>
-          <p:cNvPicPr>
-            <a:picLocks noChangeAspect="1"/>
-          </p:cNvPicPr>
-          <p:nvPr/>
-        </p:nvPicPr>
-        <p:blipFill>
-          <a:blip r:embed="rId2"/>
-          <a:stretch>
-            <a:fillRect/>
-          </a:stretch>
-        </p:blipFill>
-        <p:spPr>
-          <a:xfrm>
-            <a:off x="365760" y="1234440"/>
-            <a:ext cx="11457432" cy="2545698"/>
-          </a:xfrm>
-          <a:prstGeom prst="rect">
-            <a:avLst/>
-          </a:prstGeom>
-        </p:spPr>
-      </p:pic>
-      <p:sp>
-        <p:nvSpPr>
-          <p:cNvPr id="21" name="Rounded Rectangle 20"/>
-          <p:cNvSpPr/>
-          <p:nvPr/>
-        </p:nvSpPr>
-        <p:spPr>
-          <a:xfrm>
-            <a:off x="411480" y="4069080"/>
-            <a:ext cx="3657600" cy="2240280"/>
-          </a:xfrm>
-          <a:prstGeom prst="roundRect">
-            <a:avLst>
-              <a:gd name="adj" fmla="val 7000"/>
-            </a:avLst>
-          </a:prstGeom>
-          <a:solidFill>
-            <a:srgbClr val="F1F5F9"/>
-          </a:solidFill>
-          <a:ln w="22225">
-            <a:solidFill>
-              <a:srgbClr val="2E8B57"/>
-            </a:solidFill>
-          </a:ln>
-          <a:effectLst/>
-        </p:spPr>
-        <p:style>
-          <a:lnRef idx="1">
-            <a:schemeClr val="accent1"/>
-          </a:lnRef>
-          <a:fillRef idx="3">
-            <a:schemeClr val="accent1"/>
-          </a:fillRef>
-          <a:effectRef idx="2">
-            <a:schemeClr val="accent1"/>
-          </a:effectRef>
-          <a:fontRef idx="minor">
-            <a:schemeClr val="lt1"/>
-          </a:fontRef>
-        </p:style>
-        <p:txBody>
-          <a:bodyPr rtlCol="0" anchor="ctr"/>
-          <a:lstStyle/>
-          <a:p/>
-        </p:txBody>
-      </p:sp>
-      <p:sp>
-        <p:nvSpPr>
-          <p:cNvPr id="22" name="TextBox 21"/>
-          <p:cNvSpPr txBox="1"/>
-          <p:nvPr/>
-        </p:nvSpPr>
-        <p:spPr>
-          <a:xfrm>
-            <a:off x="521208" y="4142232"/>
-            <a:ext cx="3438144" cy="2093976"/>
-          </a:xfrm>
-          <a:prstGeom prst="rect">
-            <a:avLst/>
-          </a:prstGeom>
-          <a:noFill/>
-        </p:spPr>
-        <p:txBody>
-          <a:bodyPr wrap="square" anchor="t" lIns="45720" rIns="45720" tIns="27432" bIns="27432">
-            <a:spAutoFit/>
-          </a:bodyPr>
-          <a:lstStyle/>
-          <a:p>
-            <a:pPr algn="l">
-              <a:spcAft>
-                <a:spcPts val="500"/>
-              </a:spcAft>
-            </a:pPr>
-            <a:r>
-              <a:rPr sz="1700" b="1" i="0">
-                <a:solidFill>
-                  <a:srgbClr val="2E8B57"/>
-                </a:solidFill>
-                <a:latin typeface="Calibri"/>
-              </a:rPr>
-              <a:t>Storage cost</a:t>
-            </a:r>
-          </a:p>
-          <a:p>
-            <a:pPr algn="l">
-              <a:spcAft>
-                <a:spcPts val="300"/>
-              </a:spcAft>
-            </a:pPr>
-            <a:r>
-              <a:rPr sz="1400" b="0" i="0">
-                <a:solidFill>
-                  <a:srgbClr val="1F2937"/>
-                </a:solidFill>
-                <a:latin typeface="Calibri"/>
-              </a:rPr>
-              <a:t>•  0.15% of item cost per day</a:t>
-            </a:r>
-          </a:p>
-          <a:p>
-            <a:pPr algn="l">
-              <a:spcAft>
-                <a:spcPts val="300"/>
-              </a:spcAft>
-            </a:pPr>
-            <a:r>
-              <a:rPr sz="1400" b="0" i="0">
-                <a:solidFill>
-                  <a:srgbClr val="1F2937"/>
-                </a:solidFill>
-                <a:latin typeface="Calibri"/>
-              </a:rPr>
-              <a:t>•  High on purpose: seasonal gift items lose value</a:t>
-            </a:r>
-          </a:p>
-          <a:p>
-            <a:pPr algn="l">
-              <a:spcAft>
-                <a:spcPts val="300"/>
-              </a:spcAft>
-            </a:pPr>
-            <a:r>
-              <a:rPr sz="1400" b="0" i="0">
-                <a:solidFill>
-                  <a:srgbClr val="1F2937"/>
-                </a:solidFill>
-                <a:latin typeface="Calibri"/>
-              </a:rPr>
-              <a:t>•  An earlier 730% a year made any stock absurdly costly</a:t>
-            </a:r>
-          </a:p>
-        </p:txBody>
-      </p:sp>
-      <p:sp>
-        <p:nvSpPr>
-          <p:cNvPr id="23" name="Rounded Rectangle 22"/>
-          <p:cNvSpPr/>
-          <p:nvPr/>
-        </p:nvSpPr>
-        <p:spPr>
-          <a:xfrm>
-            <a:off x="4251960" y="4069080"/>
-            <a:ext cx="3657600" cy="2240280"/>
-          </a:xfrm>
-          <a:prstGeom prst="roundRect">
-            <a:avLst>
-              <a:gd name="adj" fmla="val 7000"/>
-            </a:avLst>
-          </a:prstGeom>
-          <a:solidFill>
-            <a:srgbClr val="F1F5F9"/>
-          </a:solidFill>
-          <a:ln w="22225">
-            <a:solidFill>
-              <a:srgbClr val="2F6FB5"/>
-            </a:solidFill>
-          </a:ln>
-          <a:effectLst/>
-        </p:spPr>
-        <p:style>
-          <a:lnRef idx="1">
-            <a:schemeClr val="accent1"/>
-          </a:lnRef>
-          <a:fillRef idx="3">
-            <a:schemeClr val="accent1"/>
-          </a:fillRef>
-          <a:effectRef idx="2">
-            <a:schemeClr val="accent1"/>
-          </a:effectRef>
-          <a:fontRef idx="minor">
-            <a:schemeClr val="lt1"/>
-          </a:fontRef>
-        </p:style>
-        <p:txBody>
-          <a:bodyPr rtlCol="0" anchor="ctr"/>
-          <a:lstStyle/>
-          <a:p/>
-        </p:txBody>
-      </p:sp>
-      <p:sp>
-        <p:nvSpPr>
-          <p:cNvPr id="24" name="TextBox 23"/>
-          <p:cNvSpPr txBox="1"/>
-          <p:nvPr/>
-        </p:nvSpPr>
-        <p:spPr>
-          <a:xfrm>
-            <a:off x="4361688" y="4142232"/>
-            <a:ext cx="3438144" cy="2093976"/>
-          </a:xfrm>
-          <a:prstGeom prst="rect">
-            <a:avLst/>
-          </a:prstGeom>
-          <a:noFill/>
-        </p:spPr>
-        <p:txBody>
-          <a:bodyPr wrap="square" anchor="t" lIns="45720" rIns="45720" tIns="27432" bIns="27432">
-            <a:spAutoFit/>
-          </a:bodyPr>
-          <a:lstStyle/>
-          <a:p>
-            <a:pPr algn="l">
-              <a:spcAft>
-                <a:spcPts val="500"/>
-              </a:spcAft>
-            </a:pPr>
-            <a:r>
-              <a:rPr sz="1700" b="1" i="0">
-                <a:solidFill>
-                  <a:srgbClr val="2F6FB5"/>
-                </a:solidFill>
-                <a:latin typeface="Calibri"/>
-              </a:rPr>
-              <a:t>Leftover stock</a:t>
-            </a:r>
-          </a:p>
-          <a:p>
-            <a:pPr algn="l">
-              <a:spcAft>
-                <a:spcPts val="300"/>
-              </a:spcAft>
-            </a:pPr>
-            <a:r>
-              <a:rPr sz="1400" b="0" i="0">
-                <a:solidFill>
-                  <a:srgbClr val="1F2937"/>
-                </a:solidFill>
-                <a:latin typeface="Calibri"/>
-              </a:rPr>
-              <a:t>•  Worth 60% of cost at day 180</a:t>
-            </a:r>
-          </a:p>
-          <a:p>
-            <a:pPr algn="l">
-              <a:spcAft>
-                <a:spcPts val="300"/>
-              </a:spcAft>
-            </a:pPr>
-            <a:r>
-              <a:rPr sz="1400" b="0" i="0">
-                <a:solidFill>
-                  <a:srgbClr val="1F2937"/>
-                </a:solidFill>
-                <a:latin typeface="Calibri"/>
-              </a:rPr>
-              <a:t>•  An earlier version wrote it off, an artefact of stopping at 180 days</a:t>
-            </a:r>
-          </a:p>
-        </p:txBody>
-      </p:sp>
-      <p:sp>
-        <p:nvSpPr>
-          <p:cNvPr id="25" name="Rounded Rectangle 24"/>
-          <p:cNvSpPr/>
-          <p:nvPr/>
-        </p:nvSpPr>
-        <p:spPr>
-          <a:xfrm>
-            <a:off x="8092440" y="4069080"/>
-            <a:ext cx="3685032" cy="2240280"/>
-          </a:xfrm>
-          <a:prstGeom prst="roundRect">
-            <a:avLst>
-              <a:gd name="adj" fmla="val 7000"/>
-            </a:avLst>
-          </a:prstGeom>
-          <a:solidFill>
-            <a:srgbClr val="F1F5F9"/>
-          </a:solidFill>
-          <a:ln w="22225">
-            <a:solidFill>
-              <a:srgbClr val="D6336C"/>
-            </a:solidFill>
-          </a:ln>
-          <a:effectLst/>
-        </p:spPr>
-        <p:style>
-          <a:lnRef idx="1">
-            <a:schemeClr val="accent1"/>
-          </a:lnRef>
-          <a:fillRef idx="3">
-            <a:schemeClr val="accent1"/>
-          </a:fillRef>
-          <a:effectRef idx="2">
-            <a:schemeClr val="accent1"/>
-          </a:effectRef>
-          <a:fontRef idx="minor">
-            <a:schemeClr val="lt1"/>
-          </a:fontRef>
-        </p:style>
-        <p:txBody>
-          <a:bodyPr rtlCol="0" anchor="ctr"/>
-          <a:lstStyle/>
-          <a:p/>
-        </p:txBody>
-      </p:sp>
-      <p:sp>
-        <p:nvSpPr>
-          <p:cNvPr id="26" name="TextBox 25"/>
-          <p:cNvSpPr txBox="1"/>
-          <p:nvPr/>
-        </p:nvSpPr>
-        <p:spPr>
-          <a:xfrm>
-            <a:off x="8202167" y="4142232"/>
-            <a:ext cx="3465576" cy="2093976"/>
-          </a:xfrm>
-          <a:prstGeom prst="rect">
-            <a:avLst/>
-          </a:prstGeom>
-          <a:noFill/>
-        </p:spPr>
-        <p:txBody>
-          <a:bodyPr wrap="square" anchor="t" lIns="45720" rIns="45720" tIns="27432" bIns="27432">
-            <a:spAutoFit/>
-          </a:bodyPr>
-          <a:lstStyle/>
-          <a:p>
-            <a:pPr algn="l">
-              <a:spcAft>
-                <a:spcPts val="500"/>
-              </a:spcAft>
-            </a:pPr>
-            <a:r>
-              <a:rPr sz="1700" b="1" i="0">
-                <a:solidFill>
-                  <a:srgbClr val="D6336C"/>
-                </a:solidFill>
-                <a:latin typeface="Calibri"/>
-              </a:rPr>
-              <a:t>One shared warehouse</a:t>
-            </a:r>
-          </a:p>
-          <a:p>
-            <a:pPr algn="l">
-              <a:spcAft>
-                <a:spcPts val="300"/>
-              </a:spcAft>
-            </a:pPr>
-            <a:r>
-              <a:rPr sz="1400" b="0" i="0">
-                <a:solidFill>
-                  <a:srgbClr val="1F2937"/>
-                </a:solidFill>
-                <a:latin typeface="Calibri"/>
-              </a:rPr>
-              <a:t>•  With per-product limits, “always order the maximum” was best</a:t>
-            </a:r>
-          </a:p>
-          <a:p>
-            <a:pPr algn="l">
-              <a:spcAft>
-                <a:spcPts val="300"/>
-              </a:spcAft>
-            </a:pPr>
-            <a:r>
-              <a:rPr sz="1400" b="0" i="0">
-                <a:solidFill>
-                  <a:srgbClr val="1F2937"/>
-                </a:solidFill>
-                <a:latin typeface="Calibri"/>
-              </a:rPr>
-              <a:t>•  A shared limit made ordering a real trade-off</a:t>
-            </a:r>
-          </a:p>
-        </p:txBody>
-      </p:sp>
-    </p:spTree>
-  </p:cSld>
-  <p:clrMapOvr>
-    <a:masterClrMapping/>
-  </p:clrMapOvr>
-</p:sld>
-</file>
-
-<file path=ppt/slides/slide27.xml><?xml version="1.0" encoding="utf-8"?>
-<p:sld xmlns:a="http://schemas.openxmlformats.org/drawingml/2006/main" xmlns:p="http://schemas.openxmlformats.org/presentationml/2006/main" xmlns:r="http://schemas.openxmlformats.org/officeDocument/2006/relationships">
-  <p:cSld>
-    <p:spTree>
-      <p:nvGrpSpPr>
-        <p:cNvPr id="1" name=""/>
-        <p:cNvGrpSpPr/>
-        <p:nvPr/>
-      </p:nvGrpSpPr>
-      <p:grpSpPr/>
-      <p:sp>
-        <p:nvSpPr>
-          <p:cNvPr id="17" name="Rectangle 16">
-            <a:extLst>
-              <a:ext uri="{FF2B5EF4-FFF2-40B4-BE49-F238E27FC236}">
-                <a16:creationId xmlns:a16="http://schemas.microsoft.com/office/drawing/2014/main" id="{684365C9-E666-36EE-4DB1-04791BFC26FB}"/>
-              </a:ext>
-            </a:extLst>
-          </p:cNvPr>
-          <p:cNvSpPr/>
-          <p:nvPr/>
-        </p:nvSpPr>
-        <p:spPr>
-          <a:xfrm>
-            <a:off x="-1" y="0"/>
-            <a:ext cx="12191998" cy="1262131"/>
-          </a:xfrm>
-          <a:prstGeom prst="rect">
-            <a:avLst/>
-          </a:prstGeom>
-          <a:gradFill flip="none" rotWithShape="1">
-            <a:gsLst>
-              <a:gs pos="0">
-                <a:srgbClr val="1A9B46">
-                  <a:tint val="66000"/>
-                  <a:satMod val="160000"/>
-                </a:srgbClr>
-              </a:gs>
-              <a:gs pos="50000">
-                <a:srgbClr val="1A9B46">
-                  <a:tint val="44500"/>
-                  <a:satMod val="160000"/>
-                </a:srgbClr>
-              </a:gs>
-              <a:gs pos="100000">
-                <a:srgbClr val="1A9B46">
-                  <a:tint val="23500"/>
-                  <a:satMod val="160000"/>
-                </a:srgbClr>
-              </a:gs>
-            </a:gsLst>
-            <a:path path="circle">
-              <a:fillToRect l="50000" t="50000" r="50000" b="50000"/>
-            </a:path>
-            <a:tileRect/>
-          </a:gradFill>
-          <a:ln>
-            <a:noFill/>
-          </a:ln>
-        </p:spPr>
-        <p:style>
-          <a:lnRef idx="2">
-            <a:schemeClr val="accent1">
-              <a:shade val="50000"/>
-            </a:schemeClr>
-          </a:lnRef>
-          <a:fillRef idx="1">
-            <a:schemeClr val="accent1"/>
-          </a:fillRef>
-          <a:effectRef idx="0">
-            <a:schemeClr val="accent1"/>
-          </a:effectRef>
-          <a:fontRef idx="minor">
-            <a:schemeClr val="lt1"/>
-          </a:fontRef>
-        </p:style>
-        <p:txBody>
-          <a:bodyPr rtlCol="0" anchor="ctr"/>
-          <a:lstStyle/>
-          <a:p>
-            <a:pPr algn="ctr"/>
-            <a:endParaRPr lang="en-IN" sz="4400" dirty="0">
-              <a:solidFill>
-                <a:schemeClr val="accent1">
-                  <a:lumMod val="50000"/>
-                </a:schemeClr>
-              </a:solidFill>
-            </a:endParaRPr>
-          </a:p>
-        </p:txBody>
-      </p:sp>
-      <p:sp>
-        <p:nvSpPr>
-          <p:cNvPr id="10" name="Google Shape;91;p1">
-            <a:extLst>
-              <a:ext uri="{FF2B5EF4-FFF2-40B4-BE49-F238E27FC236}">
-                <a16:creationId xmlns:a16="http://schemas.microsoft.com/office/drawing/2014/main" id="{4D89FC00-7640-2DC1-0BAF-6A1DC613CF6B}"/>
-              </a:ext>
-            </a:extLst>
-          </p:cNvPr>
-          <p:cNvSpPr txBox="1"/>
-          <p:nvPr/>
-        </p:nvSpPr>
-        <p:spPr>
-          <a:xfrm>
-            <a:off x="-1" y="6416040"/>
-            <a:ext cx="12191998" cy="441960"/>
-          </a:xfrm>
-          <a:prstGeom prst="rect">
-            <a:avLst/>
-          </a:prstGeom>
-          <a:gradFill flip="none" rotWithShape="1">
-            <a:gsLst>
-              <a:gs pos="0">
-                <a:srgbClr val="1A9B46">
-                  <a:tint val="66000"/>
-                  <a:satMod val="160000"/>
-                </a:srgbClr>
-              </a:gs>
-              <a:gs pos="50000">
-                <a:srgbClr val="1A9B46">
-                  <a:tint val="44500"/>
-                  <a:satMod val="160000"/>
-                </a:srgbClr>
-              </a:gs>
-              <a:gs pos="100000">
-                <a:srgbClr val="1A9B46">
-                  <a:tint val="23500"/>
-                  <a:satMod val="160000"/>
-                </a:srgbClr>
-              </a:gs>
-            </a:gsLst>
-            <a:path path="circle">
-              <a:fillToRect l="50000" t="50000" r="50000" b="50000"/>
-            </a:path>
-            <a:tileRect/>
-          </a:gradFill>
-          <a:ln>
-            <a:noFill/>
-          </a:ln>
-        </p:spPr>
-        <p:txBody>
-          <a:bodyPr spcFirstLastPara="1" wrap="square" lIns="91425" tIns="45700" rIns="91425" bIns="45700" anchor="t" anchorCtr="0">
-            <a:noAutofit/>
-          </a:bodyPr>
-          <a:lstStyle/>
-          <a:p>
-            <a:pPr marL="0" marR="0" lvl="0" indent="0" algn="ctr" rtl="0">
-              <a:lnSpc>
-                <a:spcPct val="90000"/>
-              </a:lnSpc>
-              <a:spcBef>
-                <a:spcPts val="0"/>
-              </a:spcBef>
-              <a:spcAft>
-                <a:spcPts val="0"/>
-              </a:spcAft>
-              <a:buNone/>
-            </a:pPr>
-            <a:r>
-              <a:rPr lang="en-IN" sz="1600" b="1" i="0" u="none" strike="noStrike" cap="none" dirty="0">
-                <a:solidFill>
-                  <a:srgbClr val="081271"/>
-                </a:solidFill>
-                <a:latin typeface="Times New Roman"/>
-                <a:ea typeface="Times New Roman"/>
-                <a:cs typeface="Times New Roman"/>
-                <a:sym typeface="Times New Roman"/>
-              </a:rPr>
-              <a:t>[Final Project Review]</a:t>
-            </a:r>
-            <a:r>
-              <a:rPr lang="en-IN" sz="1600" b="1" dirty="0">
-                <a:solidFill>
-                  <a:srgbClr val="081271"/>
-                </a:solidFill>
-                <a:latin typeface="Times New Roman"/>
-                <a:ea typeface="Times New Roman"/>
-                <a:cs typeface="Times New Roman"/>
-                <a:sym typeface="Times New Roman"/>
-              </a:rPr>
-              <a:t/>
-            </a:r>
-            <a:r>
-              <a:rPr lang="en-IN" sz="1600" b="1" i="0" u="none" strike="noStrike" cap="none" dirty="0">
-                <a:solidFill>
-                  <a:srgbClr val="081271"/>
-                </a:solidFill>
-                <a:latin typeface="Times New Roman"/>
-                <a:ea typeface="Times New Roman"/>
-                <a:cs typeface="Times New Roman"/>
-                <a:sym typeface="Times New Roman"/>
-              </a:rPr>
-              <a:t/>
-            </a:r>
-            <a:endParaRPr sz="1600" b="1" i="0" u="none" strike="noStrike" cap="none" dirty="0">
-              <a:solidFill>
-                <a:srgbClr val="081271"/>
-              </a:solidFill>
-              <a:latin typeface="Times New Roman"/>
-              <a:ea typeface="Times New Roman"/>
-              <a:cs typeface="Times New Roman"/>
-              <a:sym typeface="Times New Roman"/>
-            </a:endParaRPr>
-          </a:p>
-        </p:txBody>
-      </p:sp>
-      <p:cxnSp>
-        <p:nvCxnSpPr>
-          <p:cNvPr id="16" name="Straight Connector 15">
-            <a:extLst>
-              <a:ext uri="{FF2B5EF4-FFF2-40B4-BE49-F238E27FC236}">
-                <a16:creationId xmlns:a16="http://schemas.microsoft.com/office/drawing/2014/main" id="{170CA935-25F2-6478-C664-35BFDF7E813C}"/>
-              </a:ext>
-            </a:extLst>
-          </p:cNvPr>
-          <p:cNvCxnSpPr/>
-          <p:nvPr/>
-        </p:nvCxnSpPr>
-        <p:spPr>
-          <a:xfrm>
-            <a:off x="0" y="1260899"/>
-            <a:ext cx="12192000" cy="0"/>
-          </a:xfrm>
-          <a:prstGeom prst="line">
-            <a:avLst/>
-          </a:prstGeom>
-          <a:ln w="28575">
-            <a:solidFill>
-              <a:srgbClr val="1A9B46"/>
-            </a:solidFill>
-          </a:ln>
-        </p:spPr>
-        <p:style>
-          <a:lnRef idx="1">
-            <a:schemeClr val="accent1"/>
-          </a:lnRef>
-          <a:fillRef idx="0">
-            <a:schemeClr val="accent1"/>
-          </a:fillRef>
-          <a:effectRef idx="0">
-            <a:schemeClr val="accent1"/>
-          </a:effectRef>
-          <a:fontRef idx="minor">
-            <a:schemeClr val="tx1"/>
-          </a:fontRef>
-        </p:style>
-      </p:cxnSp>
-      <p:sp>
-        <p:nvSpPr>
-          <p:cNvPr id="2" name="Title 1"/>
-          <p:cNvSpPr>
-            <a:spLocks noGrp="1"/>
-          </p:cNvSpPr>
-          <p:nvPr>
-            <p:ph type="title"/>
-          </p:nvPr>
-        </p:nvSpPr>
-        <p:spPr/>
-        <p:txBody>
-          <a:bodyPr/>
-          <a:lstStyle/>
-          <a:p>
-            <a:r>
-              <a:rPr sz="3200"/>
-              <a:t>Methodology: The RL Agent</a:t>
-            </a:r>
-          </a:p>
-        </p:txBody>
-      </p:sp>
-      <p:sp>
-        <p:nvSpPr>
-          <p:cNvPr id="19" name="Slide Number Placeholder 18">
-            <a:extLst>
-              <a:ext uri="{FF2B5EF4-FFF2-40B4-BE49-F238E27FC236}">
-                <a16:creationId xmlns:a16="http://schemas.microsoft.com/office/drawing/2014/main" id="{9B6D94B3-8D6F-6862-5C85-C28EA1FEBFFD}"/>
-              </a:ext>
-            </a:extLst>
-          </p:cNvPr>
-          <p:cNvSpPr>
-            <a:spLocks noGrp="1"/>
-          </p:cNvSpPr>
-          <p:nvPr>
-            <p:ph type="sldNum" sz="quarter" idx="12"/>
-          </p:nvPr>
-        </p:nvSpPr>
-        <p:spPr/>
-        <p:txBody>
-          <a:bodyPr/>
-          <a:lstStyle/>
-          <a:p>
-            <a:fld id="{C2216105-7B7A-4C42-B2A1-5E9A2FA4F8FD}" type="slidenum">
-              <a:rPr lang="en-IN" smtClean="0"/>
-              <a:t>3</a:t>
-            </a:fld>
-            <a:endParaRPr lang="en-IN" dirty="0"/>
-          </a:p>
-        </p:txBody>
-      </p:sp>
-      <p:sp>
-        <p:nvSpPr>
-          <p:cNvPr id="20" name="Rounded Rectangle 19"/>
-          <p:cNvSpPr/>
-          <p:nvPr/>
-        </p:nvSpPr>
-        <p:spPr>
-          <a:xfrm>
-            <a:off x="411480" y="1371600"/>
-            <a:ext cx="3657600" cy="2331720"/>
-          </a:xfrm>
-          <a:prstGeom prst="roundRect">
-            <a:avLst>
-              <a:gd name="adj" fmla="val 7000"/>
-            </a:avLst>
-          </a:prstGeom>
-          <a:solidFill>
-            <a:srgbClr val="E7F0FA"/>
-          </a:solidFill>
-          <a:ln w="22225">
-            <a:solidFill>
-              <a:srgbClr val="2F6FB5"/>
-            </a:solidFill>
-          </a:ln>
-          <a:effectLst/>
-        </p:spPr>
-        <p:style>
-          <a:lnRef idx="1">
-            <a:schemeClr val="accent1"/>
-          </a:lnRef>
-          <a:fillRef idx="3">
-            <a:schemeClr val="accent1"/>
-          </a:fillRef>
-          <a:effectRef idx="2">
-            <a:schemeClr val="accent1"/>
-          </a:effectRef>
-          <a:fontRef idx="minor">
-            <a:schemeClr val="lt1"/>
-          </a:fontRef>
-        </p:style>
-        <p:txBody>
-          <a:bodyPr rtlCol="0" anchor="ctr"/>
-          <a:lstStyle/>
-          <a:p/>
-        </p:txBody>
-      </p:sp>
-      <p:sp>
-        <p:nvSpPr>
-          <p:cNvPr id="21" name="TextBox 20"/>
-          <p:cNvSpPr txBox="1"/>
-          <p:nvPr/>
-        </p:nvSpPr>
-        <p:spPr>
-          <a:xfrm>
-            <a:off x="521208" y="1444752"/>
-            <a:ext cx="3438144" cy="2185415"/>
-          </a:xfrm>
-          <a:prstGeom prst="rect">
-            <a:avLst/>
-          </a:prstGeom>
-          <a:noFill/>
-        </p:spPr>
-        <p:txBody>
-          <a:bodyPr wrap="square" anchor="t" lIns="45720" rIns="45720" tIns="27432" bIns="27432">
-            <a:spAutoFit/>
-          </a:bodyPr>
-          <a:lstStyle/>
-          <a:p>
-            <a:pPr algn="l">
-              <a:spcAft>
-                <a:spcPts val="500"/>
-              </a:spcAft>
-            </a:pPr>
-            <a:r>
-              <a:rPr sz="1700" b="1" i="0">
-                <a:solidFill>
-                  <a:srgbClr val="2F6FB5"/>
-                </a:solidFill>
-                <a:latin typeface="Calibri"/>
-              </a:rPr>
-              <a:t>What it sees: 88 numbers</a:t>
-            </a:r>
-          </a:p>
-          <a:p>
-            <a:pPr algn="l">
-              <a:spcAft>
-                <a:spcPts val="300"/>
-              </a:spcAft>
-            </a:pPr>
-            <a:r>
-              <a:rPr sz="1400" b="0" i="0">
-                <a:solidFill>
-                  <a:srgbClr val="1F2937"/>
-                </a:solidFill>
-                <a:latin typeface="Calibri"/>
-              </a:rPr>
-              <a:t>•  Per product: stock, stock on order, days of cover, 7-day demand, variability, trend, backlog</a:t>
-            </a:r>
-          </a:p>
-          <a:p>
-            <a:pPr algn="l">
-              <a:spcAft>
-                <a:spcPts val="300"/>
-              </a:spcAft>
-            </a:pPr>
-            <a:r>
-              <a:rPr sz="1400" b="0" i="0">
-                <a:solidFill>
-                  <a:srgbClr val="1F2937"/>
-                </a:solidFill>
-                <a:latin typeface="Calibri"/>
-              </a:rPr>
-              <a:t>•  Weekday, season, supplier availability, lead time, reliability</a:t>
-            </a:r>
-          </a:p>
-        </p:txBody>
-      </p:sp>
-      <p:sp>
-        <p:nvSpPr>
-          <p:cNvPr id="22" name="Rounded Rectangle 21"/>
-          <p:cNvSpPr/>
-          <p:nvPr/>
-        </p:nvSpPr>
-        <p:spPr>
-          <a:xfrm>
-            <a:off x="4251960" y="1371600"/>
-            <a:ext cx="3657600" cy="2331720"/>
-          </a:xfrm>
-          <a:prstGeom prst="roundRect">
-            <a:avLst>
-              <a:gd name="adj" fmla="val 7000"/>
-            </a:avLst>
-          </a:prstGeom>
-          <a:solidFill>
-            <a:srgbClr val="FDE8EF"/>
-          </a:solidFill>
-          <a:ln w="22225">
-            <a:solidFill>
-              <a:srgbClr val="D6336C"/>
-            </a:solidFill>
-          </a:ln>
-          <a:effectLst/>
-        </p:spPr>
-        <p:style>
-          <a:lnRef idx="1">
-            <a:schemeClr val="accent1"/>
-          </a:lnRef>
-          <a:fillRef idx="3">
-            <a:schemeClr val="accent1"/>
-          </a:fillRef>
-          <a:effectRef idx="2">
-            <a:schemeClr val="accent1"/>
-          </a:effectRef>
-          <a:fontRef idx="minor">
-            <a:schemeClr val="lt1"/>
-          </a:fontRef>
-        </p:style>
-        <p:txBody>
-          <a:bodyPr rtlCol="0" anchor="ctr"/>
-          <a:lstStyle/>
-          <a:p/>
-        </p:txBody>
-      </p:sp>
-      <p:sp>
-        <p:nvSpPr>
-          <p:cNvPr id="23" name="TextBox 22"/>
-          <p:cNvSpPr txBox="1"/>
-          <p:nvPr/>
-        </p:nvSpPr>
-        <p:spPr>
-          <a:xfrm>
-            <a:off x="4361688" y="1444752"/>
-            <a:ext cx="3438144" cy="2185415"/>
-          </a:xfrm>
-          <a:prstGeom prst="rect">
-            <a:avLst/>
-          </a:prstGeom>
-          <a:noFill/>
-        </p:spPr>
-        <p:txBody>
-          <a:bodyPr wrap="square" anchor="t" lIns="45720" rIns="45720" tIns="27432" bIns="27432">
-            <a:spAutoFit/>
-          </a:bodyPr>
-          <a:lstStyle/>
-          <a:p>
-            <a:pPr algn="l">
-              <a:spcAft>
-                <a:spcPts val="500"/>
-              </a:spcAft>
-            </a:pPr>
-            <a:r>
-              <a:rPr sz="1700" b="1" i="0">
-                <a:solidFill>
-                  <a:srgbClr val="D6336C"/>
-                </a:solidFill>
-                <a:latin typeface="Calibri"/>
-              </a:rPr>
-              <a:t>What it decides</a:t>
-            </a:r>
-          </a:p>
-          <a:p>
-            <a:pPr algn="l">
-              <a:spcAft>
-                <a:spcPts val="300"/>
-              </a:spcAft>
-            </a:pPr>
-            <a:r>
-              <a:rPr sz="1400" b="0" i="0">
-                <a:solidFill>
-                  <a:srgbClr val="1F2937"/>
-                </a:solidFill>
-                <a:latin typeface="Calibri"/>
-              </a:rPr>
-              <a:t>•  One of 21 options per product</a:t>
-            </a:r>
-          </a:p>
-          <a:p>
-            <a:pPr algn="l">
-              <a:spcAft>
-                <a:spcPts val="300"/>
-              </a:spcAft>
-            </a:pPr>
-            <a:r>
-              <a:rPr sz="1400" b="0" i="0">
-                <a:solidFill>
-                  <a:srgbClr val="1F2937"/>
-                </a:solidFill>
-                <a:latin typeface="Calibri"/>
-              </a:rPr>
-              <a:t>•  7 quantity levels × 3 suppliers</a:t>
-            </a:r>
-          </a:p>
-          <a:p>
-            <a:pPr algn="l">
-              <a:spcAft>
-                <a:spcPts val="300"/>
-              </a:spcAft>
-            </a:pPr>
-            <a:r>
-              <a:rPr sz="1400" b="0" i="0">
-                <a:solidFill>
-                  <a:srgbClr val="1F2937"/>
-                </a:solidFill>
-                <a:latin typeface="Calibri"/>
-              </a:rPr>
-              <a:t>•  Offline suppliers and oversize orders are masked</a:t>
-            </a:r>
-          </a:p>
-        </p:txBody>
-      </p:sp>
-      <p:sp>
-        <p:nvSpPr>
-          <p:cNvPr id="24" name="Rounded Rectangle 23"/>
-          <p:cNvSpPr/>
-          <p:nvPr/>
-        </p:nvSpPr>
-        <p:spPr>
-          <a:xfrm>
-            <a:off x="8092440" y="1371600"/>
-            <a:ext cx="3685032" cy="2331720"/>
-          </a:xfrm>
-          <a:prstGeom prst="roundRect">
-            <a:avLst>
-              <a:gd name="adj" fmla="val 7000"/>
-            </a:avLst>
-          </a:prstGeom>
-          <a:solidFill>
-            <a:srgbClr val="E6F4EA"/>
-          </a:solidFill>
-          <a:ln w="22225">
-            <a:solidFill>
-              <a:srgbClr val="2E8B57"/>
-            </a:solidFill>
-          </a:ln>
-          <a:effectLst/>
-        </p:spPr>
-        <p:style>
-          <a:lnRef idx="1">
-            <a:schemeClr val="accent1"/>
-          </a:lnRef>
-          <a:fillRef idx="3">
-            <a:schemeClr val="accent1"/>
-          </a:fillRef>
-          <a:effectRef idx="2">
-            <a:schemeClr val="accent1"/>
-          </a:effectRef>
-          <a:fontRef idx="minor">
-            <a:schemeClr val="lt1"/>
-          </a:fontRef>
-        </p:style>
-        <p:txBody>
-          <a:bodyPr rtlCol="0" anchor="ctr"/>
-          <a:lstStyle/>
-          <a:p/>
-        </p:txBody>
-      </p:sp>
-      <p:sp>
-        <p:nvSpPr>
-          <p:cNvPr id="25" name="TextBox 24"/>
-          <p:cNvSpPr txBox="1"/>
-          <p:nvPr/>
-        </p:nvSpPr>
-        <p:spPr>
-          <a:xfrm>
-            <a:off x="8202167" y="1444752"/>
-            <a:ext cx="3465576" cy="2185415"/>
-          </a:xfrm>
-          <a:prstGeom prst="rect">
-            <a:avLst/>
-          </a:prstGeom>
-          <a:noFill/>
-        </p:spPr>
-        <p:txBody>
-          <a:bodyPr wrap="square" anchor="t" lIns="45720" rIns="45720" tIns="27432" bIns="27432">
-            <a:spAutoFit/>
-          </a:bodyPr>
-          <a:lstStyle/>
-          <a:p>
-            <a:pPr algn="l">
-              <a:spcAft>
-                <a:spcPts val="500"/>
-              </a:spcAft>
-            </a:pPr>
-            <a:r>
-              <a:rPr sz="1700" b="1" i="0">
-                <a:solidFill>
-                  <a:srgbClr val="2E8B57"/>
-                </a:solidFill>
-                <a:latin typeface="Calibri"/>
-              </a:rPr>
-              <a:t>What it is rewarded for</a:t>
-            </a:r>
-          </a:p>
-          <a:p>
-            <a:pPr algn="l">
-              <a:spcAft>
-                <a:spcPts val="300"/>
-              </a:spcAft>
-            </a:pPr>
-            <a:r>
-              <a:rPr sz="1400" b="0" i="0">
-                <a:solidFill>
-                  <a:srgbClr val="1F2937"/>
-                </a:solidFill>
-                <a:latin typeface="Calibri"/>
-              </a:rPr>
-              <a:t>•  That day’s profit, scaled and clipped</a:t>
-            </a:r>
-          </a:p>
-          <a:p>
-            <a:pPr algn="l">
-              <a:spcAft>
-                <a:spcPts val="300"/>
-              </a:spcAft>
-            </a:pPr>
-            <a:r>
-              <a:rPr sz="1400" b="0" i="0">
-                <a:solidFill>
-                  <a:srgbClr val="1F2937"/>
-                </a:solidFill>
-                <a:latin typeface="Calibri"/>
-              </a:rPr>
-              <a:t>•  Zero during the 14-day warm-up</a:t>
-            </a:r>
-          </a:p>
-          <a:p>
-            <a:pPr algn="l">
-              <a:spcAft>
-                <a:spcPts val="300"/>
-              </a:spcAft>
-            </a:pPr>
-            <a:r>
-              <a:rPr sz="1400" b="0" i="0">
-                <a:solidFill>
-                  <a:srgbClr val="1F2937"/>
-                </a:solidFill>
-                <a:latin typeface="Calibri"/>
-              </a:rPr>
-              <a:t>•  Not shown: any ordering history (see error analysis)</a:t>
-            </a:r>
-          </a:p>
-        </p:txBody>
-      </p:sp>
-      <p:graphicFrame>
-        <p:nvGraphicFramePr>
-          <p:cNvPr id="26" name="Table 25"/>
-          <p:cNvGraphicFramePr>
-            <a:graphicFrameLocks noGrp="1"/>
-          </p:cNvGraphicFramePr>
-          <p:nvPr/>
-        </p:nvGraphicFramePr>
-        <p:xfrm>
-          <a:off x="411480" y="3931920"/>
-          <a:ext cx="5120640" cy="2194560"/>
-        </p:xfrm>
-        <a:graphic>
-          <a:graphicData uri="http://schemas.openxmlformats.org/drawingml/2006/table">
-            <a:tbl>
-              <a:tblPr firstRow="1" bandRow="1">
-                <a:tableStyleId>{5C22544A-7EE6-4342-B048-85BDC9FD1C3A}</a:tableStyleId>
-              </a:tblPr>
-              <a:tblGrid>
-                <a:gridCol w="2560320"/>
-                <a:gridCol w="2560320"/>
-              </a:tblGrid>
-              <a:tr h="365760">
-                <a:tc>
-                  <a:txBody>
-                    <a:bodyPr wrap="square"/>
-                    <a:lstStyle/>
-                    <a:p>
-                      <a:pPr algn="l"/>
-                      <a:r>
-                        <a:rPr sz="1300" b="1" i="0">
-                          <a:solidFill>
-                            <a:srgbClr val="FFFFFF"/>
-                          </a:solidFill>
-                          <a:latin typeface="Calibri"/>
-                        </a:rPr>
-                        <a:t>Winning setting</a:t>
-                      </a:r>
-                    </a:p>
-                  </a:txBody>
-                  <a:tcPr marL="54864" marR="54864" marT="18288" marB="18288" anchor="ctr">
-                    <a:solidFill>
-                      <a:srgbClr val="2E8B57"/>
-                    </a:solidFill>
-                  </a:tcPr>
-                </a:tc>
-                <a:tc>
-                  <a:txBody>
-                    <a:bodyPr wrap="square"/>
-                    <a:lstStyle/>
-                    <a:p>
-                      <a:pPr algn="ctr"/>
-                      <a:r>
-                        <a:rPr sz="1300" b="1" i="0">
-                          <a:solidFill>
-                            <a:srgbClr val="FFFFFF"/>
-                          </a:solidFill>
-                          <a:latin typeface="Calibri"/>
-                        </a:rPr>
-                        <a:t>Value</a:t>
-                      </a:r>
-                    </a:p>
-                  </a:txBody>
-                  <a:tcPr marL="54864" marR="54864" marT="18288" marB="18288" anchor="ctr">
-                    <a:solidFill>
-                      <a:srgbClr val="2E8B57"/>
-                    </a:solidFill>
-                  </a:tcPr>
-                </a:tc>
-              </a:tr>
-              <a:tr h="365760">
-                <a:tc>
-                  <a:txBody>
-                    <a:bodyPr wrap="square"/>
-                    <a:lstStyle/>
-                    <a:p>
-                      <a:r>
-                        <a:rPr sz="1300" b="0" i="0">
-                          <a:solidFill>
-                            <a:srgbClr val="1F2937"/>
-                          </a:solidFill>
-                          <a:latin typeface="Calibri"/>
-                        </a:rPr>
-                        <a:t>Learning rate</a:t>
-                      </a:r>
-                    </a:p>
-                  </a:txBody>
-                  <a:tcPr marL="54864" marR="54864" marT="18288" marB="18288" anchor="ctr">
-                    <a:solidFill>
-                      <a:srgbClr val="FFFFFF"/>
-                    </a:solidFill>
-                  </a:tcPr>
-                </a:tc>
-                <a:tc>
-                  <a:txBody>
-                    <a:bodyPr wrap="square"/>
-                    <a:lstStyle/>
-                    <a:p>
-                      <a:pPr algn="ctr"/>
-                      <a:r>
-                        <a:rPr sz="1300" b="0" i="0">
-                          <a:solidFill>
-                            <a:srgbClr val="1F2937"/>
-                          </a:solidFill>
-                          <a:latin typeface="Calibri"/>
-                        </a:rPr>
-                        <a:t>5e-5 (lowest offered)</a:t>
-                      </a:r>
-                    </a:p>
-                  </a:txBody>
-                  <a:tcPr marL="54864" marR="54864" marT="18288" marB="18288" anchor="ctr">
-                    <a:solidFill>
-                      <a:srgbClr val="FFFFFF"/>
-                    </a:solidFill>
-                  </a:tcPr>
-                </a:tc>
-              </a:tr>
-              <a:tr h="365760">
-                <a:tc>
-                  <a:txBody>
-                    <a:bodyPr wrap="square"/>
-                    <a:lstStyle/>
-                    <a:p>
-                      <a:r>
-                        <a:rPr sz="1300" b="0" i="0">
-                          <a:solidFill>
-                            <a:srgbClr val="1F2937"/>
-                          </a:solidFill>
-                          <a:latin typeface="Calibri"/>
-                        </a:rPr>
-                        <a:t>Entropy coefficient</a:t>
-                      </a:r>
-                    </a:p>
-                  </a:txBody>
-                  <a:tcPr marL="54864" marR="54864" marT="18288" marB="18288" anchor="ctr">
-                    <a:solidFill>
-                      <a:srgbClr val="F1F5F9"/>
-                    </a:solidFill>
-                  </a:tcPr>
-                </a:tc>
-                <a:tc>
-                  <a:txBody>
-                    <a:bodyPr wrap="square"/>
-                    <a:lstStyle/>
-                    <a:p>
-                      <a:pPr algn="ctr"/>
-                      <a:r>
-                        <a:rPr sz="1300" b="0" i="0">
-                          <a:solidFill>
-                            <a:srgbClr val="1F2937"/>
-                          </a:solidFill>
-                          <a:latin typeface="Calibri"/>
-                        </a:rPr>
-                        <a:t>0.005</a:t>
-                      </a:r>
-                    </a:p>
-                  </a:txBody>
-                  <a:tcPr marL="54864" marR="54864" marT="18288" marB="18288" anchor="ctr">
-                    <a:solidFill>
-                      <a:srgbClr val="F1F5F9"/>
-                    </a:solidFill>
-                  </a:tcPr>
-                </a:tc>
-              </a:tr>
-              <a:tr h="365760">
-                <a:tc>
-                  <a:txBody>
-                    <a:bodyPr wrap="square"/>
-                    <a:lstStyle/>
-                    <a:p>
-                      <a:r>
-                        <a:rPr sz="1300" b="0" i="0">
-                          <a:solidFill>
-                            <a:srgbClr val="1F2937"/>
-                          </a:solidFill>
-                          <a:latin typeface="Calibri"/>
-                        </a:rPr>
-                        <a:t>Discount γ</a:t>
-                      </a:r>
-                    </a:p>
-                  </a:txBody>
-                  <a:tcPr marL="54864" marR="54864" marT="18288" marB="18288" anchor="ctr">
-                    <a:solidFill>
-                      <a:srgbClr val="FFFFFF"/>
-                    </a:solidFill>
-                  </a:tcPr>
-                </a:tc>
-                <a:tc>
-                  <a:txBody>
-                    <a:bodyPr wrap="square"/>
-                    <a:lstStyle/>
-                    <a:p>
-                      <a:pPr algn="ctr"/>
-                      <a:r>
-                        <a:rPr sz="1300" b="0" i="0">
-                          <a:solidFill>
-                            <a:srgbClr val="1F2937"/>
-                          </a:solidFill>
-                          <a:latin typeface="Calibri"/>
-                        </a:rPr>
-                        <a:t>0.995</a:t>
-                      </a:r>
-                    </a:p>
-                  </a:txBody>
-                  <a:tcPr marL="54864" marR="54864" marT="18288" marB="18288" anchor="ctr">
-                    <a:solidFill>
-                      <a:srgbClr val="FFFFFF"/>
-                    </a:solidFill>
-                  </a:tcPr>
-                </a:tc>
-              </a:tr>
-              <a:tr h="365760">
-                <a:tc>
-                  <a:txBody>
-                    <a:bodyPr wrap="square"/>
-                    <a:lstStyle/>
-                    <a:p>
-                      <a:r>
-                        <a:rPr sz="1300" b="0" i="0">
-                          <a:solidFill>
-                            <a:srgbClr val="1F2937"/>
-                          </a:solidFill>
-                          <a:latin typeface="Calibri"/>
-                        </a:rPr>
-                        <a:t>Rollout length</a:t>
-                      </a:r>
-                    </a:p>
-                  </a:txBody>
-                  <a:tcPr marL="54864" marR="54864" marT="18288" marB="18288" anchor="ctr">
-                    <a:solidFill>
-                      <a:srgbClr val="F1F5F9"/>
-                    </a:solidFill>
-                  </a:tcPr>
-                </a:tc>
-                <a:tc>
-                  <a:txBody>
-                    <a:bodyPr wrap="square"/>
-                    <a:lstStyle/>
-                    <a:p>
-                      <a:pPr algn="ctr"/>
-                      <a:r>
-                        <a:rPr sz="1300" b="0" i="0">
-                          <a:solidFill>
-                            <a:srgbClr val="1F2937"/>
-                          </a:solidFill>
-                          <a:latin typeface="Calibri"/>
-                        </a:rPr>
-                        <a:t>1024</a:t>
-                      </a:r>
-                    </a:p>
-                  </a:txBody>
-                  <a:tcPr marL="54864" marR="54864" marT="18288" marB="18288" anchor="ctr">
-                    <a:solidFill>
-                      <a:srgbClr val="F1F5F9"/>
-                    </a:solidFill>
-                  </a:tcPr>
-                </a:tc>
-              </a:tr>
-              <a:tr h="365760">
-                <a:tc>
-                  <a:txBody>
-                    <a:bodyPr wrap="square"/>
-                    <a:lstStyle/>
-                    <a:p>
-                      <a:r>
-                        <a:rPr sz="1300" b="0" i="0">
-                          <a:solidFill>
-                            <a:srgbClr val="1F2937"/>
-                          </a:solidFill>
-                          <a:latin typeface="Calibri"/>
-                        </a:rPr>
-                        <a:t>Network</a:t>
-                      </a:r>
-                    </a:p>
-                  </a:txBody>
-                  <a:tcPr marL="54864" marR="54864" marT="18288" marB="18288" anchor="ctr">
-                    <a:solidFill>
-                      <a:srgbClr val="FFFFFF"/>
-                    </a:solidFill>
-                  </a:tcPr>
-                </a:tc>
-                <a:tc>
-                  <a:txBody>
-                    <a:bodyPr wrap="square"/>
-                    <a:lstStyle/>
-                    <a:p>
-                      <a:pPr algn="ctr"/>
-                      <a:r>
-                        <a:rPr sz="1300" b="0" i="0">
-                          <a:solidFill>
-                            <a:srgbClr val="1F2937"/>
-                          </a:solidFill>
-                          <a:latin typeface="Calibri"/>
-                        </a:rPr>
-                        <a:t>2 × 256, CPU</a:t>
-                      </a:r>
-                    </a:p>
-                  </a:txBody>
-                  <a:tcPr marL="54864" marR="54864" marT="18288" marB="18288" anchor="ctr">
-                    <a:solidFill>
-                      <a:srgbClr val="FFFFFF"/>
-                    </a:solidFill>
-                  </a:tcPr>
-                </a:tc>
-              </a:tr>
-            </a:tbl>
-          </a:graphicData>
-        </a:graphic>
-      </p:graphicFrame>
-      <p:sp>
-        <p:nvSpPr>
-          <p:cNvPr id="27" name="TextBox 26"/>
-          <p:cNvSpPr txBox="1"/>
-          <p:nvPr/>
-        </p:nvSpPr>
-        <p:spPr>
-          <a:xfrm>
-            <a:off x="5806440" y="3931920"/>
-            <a:ext cx="5943600" cy="2377440"/>
-          </a:xfrm>
-          <a:prstGeom prst="rect">
-            <a:avLst/>
-          </a:prstGeom>
-          <a:noFill/>
-        </p:spPr>
-        <p:txBody>
-          <a:bodyPr wrap="square" anchor="t" lIns="45720" rIns="45720" tIns="27432" bIns="27432">
-            <a:spAutoFit/>
-          </a:bodyPr>
-          <a:lstStyle/>
-          <a:p>
-            <a:pPr algn="l">
-              <a:spcAft>
-                <a:spcPts val="400"/>
-              </a:spcAft>
-            </a:pPr>
-            <a:r>
-              <a:rPr sz="1700" b="1" i="0">
-                <a:solidFill>
-                  <a:srgbClr val="1B5E3A"/>
-                </a:solidFill>
-                <a:latin typeface="Calibri"/>
-              </a:rPr>
-              <a:t>Hyperparameter search</a:t>
-            </a:r>
-          </a:p>
-          <a:p>
-            <a:pPr algn="l">
-              <a:spcAft>
-                <a:spcPts val="400"/>
-              </a:spcAft>
-            </a:pPr>
-            <a:r>
-              <a:rPr sz="1400" b="0" i="0">
-                <a:solidFill>
-                  <a:srgbClr val="1F2937"/>
-                </a:solidFill>
-                <a:latin typeface="Calibri"/>
-              </a:rPr>
-              <a:t>•  8 configurations, 250,000-step trial each</a:t>
-            </a:r>
-          </a:p>
-          <a:p>
-            <a:pPr algn="l">
-              <a:spcAft>
-                <a:spcPts val="400"/>
-              </a:spcAft>
-            </a:pPr>
-            <a:r>
-              <a:rPr sz="1400" b="0" i="0">
-                <a:solidFill>
-                  <a:srgbClr val="1F2937"/>
-                </a:solidFill>
-                <a:latin typeface="Calibri"/>
-              </a:rPr>
-              <a:t>•  Best 2 trained to 2M steps on Kaggle (about 4.8 hours)</a:t>
-            </a:r>
-          </a:p>
-          <a:p>
-            <a:pPr algn="l">
-              <a:spcAft>
-                <a:spcPts val="400"/>
-              </a:spcAft>
-            </a:pPr>
-            <a:r>
-              <a:rPr sz="1400" b="0" i="0">
-                <a:solidFill>
-                  <a:srgbClr val="1F2937"/>
-                </a:solidFill>
-                <a:latin typeface="Calibri"/>
-              </a:rPr>
-              <a:t>•  Winner: lowest learning rate, larger network. Earlier runs were unstable because they learned too fast, not because the network was too small.</a:t>
-            </a:r>
-          </a:p>
-        </p:txBody>
-      </p:sp>
-    </p:spTree>
-  </p:cSld>
-  <p:clrMapOvr>
-    <a:masterClrMapping/>
-  </p:clrMapOvr>
-</p:sld>
-</file>
-
-<file path=ppt/slides/slide28.xml><?xml version="1.0" encoding="utf-8"?>
-<p:sld xmlns:a="http://schemas.openxmlformats.org/drawingml/2006/main" xmlns:p="http://schemas.openxmlformats.org/presentationml/2006/main" xmlns:r="http://schemas.openxmlformats.org/officeDocument/2006/relationships">
-  <p:cSld>
-    <p:spTree>
-      <p:nvGrpSpPr>
-        <p:cNvPr id="1" name=""/>
-        <p:cNvGrpSpPr/>
-        <p:nvPr/>
-      </p:nvGrpSpPr>
-      <p:grpSpPr/>
-      <p:sp>
-        <p:nvSpPr>
-          <p:cNvPr id="17" name="Rectangle 16">
-            <a:extLst>
-              <a:ext uri="{FF2B5EF4-FFF2-40B4-BE49-F238E27FC236}">
-                <a16:creationId xmlns:a16="http://schemas.microsoft.com/office/drawing/2014/main" id="{684365C9-E666-36EE-4DB1-04791BFC26FB}"/>
-              </a:ext>
-            </a:extLst>
-          </p:cNvPr>
-          <p:cNvSpPr/>
-          <p:nvPr/>
-        </p:nvSpPr>
-        <p:spPr>
-          <a:xfrm>
-            <a:off x="-1" y="0"/>
-            <a:ext cx="12191998" cy="1262131"/>
-          </a:xfrm>
-          <a:prstGeom prst="rect">
-            <a:avLst/>
-          </a:prstGeom>
-          <a:gradFill flip="none" rotWithShape="1">
-            <a:gsLst>
-              <a:gs pos="0">
-                <a:srgbClr val="1A9B46">
-                  <a:tint val="66000"/>
-                  <a:satMod val="160000"/>
-                </a:srgbClr>
-              </a:gs>
-              <a:gs pos="50000">
-                <a:srgbClr val="1A9B46">
-                  <a:tint val="44500"/>
-                  <a:satMod val="160000"/>
-                </a:srgbClr>
-              </a:gs>
-              <a:gs pos="100000">
-                <a:srgbClr val="1A9B46">
-                  <a:tint val="23500"/>
-                  <a:satMod val="160000"/>
-                </a:srgbClr>
-              </a:gs>
-            </a:gsLst>
-            <a:path path="circle">
-              <a:fillToRect l="50000" t="50000" r="50000" b="50000"/>
-            </a:path>
-            <a:tileRect/>
-          </a:gradFill>
-          <a:ln>
-            <a:noFill/>
-          </a:ln>
-        </p:spPr>
-        <p:style>
-          <a:lnRef idx="2">
-            <a:schemeClr val="accent1">
-              <a:shade val="50000"/>
-            </a:schemeClr>
-          </a:lnRef>
-          <a:fillRef idx="1">
-            <a:schemeClr val="accent1"/>
-          </a:fillRef>
-          <a:effectRef idx="0">
-            <a:schemeClr val="accent1"/>
-          </a:effectRef>
-          <a:fontRef idx="minor">
-            <a:schemeClr val="lt1"/>
-          </a:fontRef>
-        </p:style>
-        <p:txBody>
-          <a:bodyPr rtlCol="0" anchor="ctr"/>
-          <a:lstStyle/>
-          <a:p>
-            <a:pPr algn="ctr"/>
-            <a:endParaRPr lang="en-IN" sz="4400" dirty="0">
-              <a:solidFill>
-                <a:schemeClr val="accent1">
-                  <a:lumMod val="50000"/>
-                </a:schemeClr>
-              </a:solidFill>
-            </a:endParaRPr>
-          </a:p>
-        </p:txBody>
-      </p:sp>
-      <p:sp>
-        <p:nvSpPr>
-          <p:cNvPr id="10" name="Google Shape;91;p1">
-            <a:extLst>
-              <a:ext uri="{FF2B5EF4-FFF2-40B4-BE49-F238E27FC236}">
-                <a16:creationId xmlns:a16="http://schemas.microsoft.com/office/drawing/2014/main" id="{4D89FC00-7640-2DC1-0BAF-6A1DC613CF6B}"/>
-              </a:ext>
-            </a:extLst>
-          </p:cNvPr>
-          <p:cNvSpPr txBox="1"/>
-          <p:nvPr/>
-        </p:nvSpPr>
-        <p:spPr>
-          <a:xfrm>
-            <a:off x="-1" y="6416040"/>
-            <a:ext cx="12191998" cy="441960"/>
-          </a:xfrm>
-          <a:prstGeom prst="rect">
-            <a:avLst/>
-          </a:prstGeom>
-          <a:gradFill flip="none" rotWithShape="1">
-            <a:gsLst>
-              <a:gs pos="0">
-                <a:srgbClr val="1A9B46">
-                  <a:tint val="66000"/>
-                  <a:satMod val="160000"/>
-                </a:srgbClr>
-              </a:gs>
-              <a:gs pos="50000">
-                <a:srgbClr val="1A9B46">
-                  <a:tint val="44500"/>
-                  <a:satMod val="160000"/>
-                </a:srgbClr>
-              </a:gs>
-              <a:gs pos="100000">
-                <a:srgbClr val="1A9B46">
-                  <a:tint val="23500"/>
-                  <a:satMod val="160000"/>
-                </a:srgbClr>
-              </a:gs>
-            </a:gsLst>
-            <a:path path="circle">
-              <a:fillToRect l="50000" t="50000" r="50000" b="50000"/>
-            </a:path>
-            <a:tileRect/>
-          </a:gradFill>
-          <a:ln>
-            <a:noFill/>
-          </a:ln>
-        </p:spPr>
-        <p:txBody>
-          <a:bodyPr spcFirstLastPara="1" wrap="square" lIns="91425" tIns="45700" rIns="91425" bIns="45700" anchor="t" anchorCtr="0">
-            <a:noAutofit/>
-          </a:bodyPr>
-          <a:lstStyle/>
-          <a:p>
-            <a:pPr marL="0" marR="0" lvl="0" indent="0" algn="ctr" rtl="0">
-              <a:lnSpc>
-                <a:spcPct val="90000"/>
-              </a:lnSpc>
-              <a:spcBef>
-                <a:spcPts val="0"/>
-              </a:spcBef>
-              <a:spcAft>
-                <a:spcPts val="0"/>
-              </a:spcAft>
-              <a:buNone/>
-            </a:pPr>
-            <a:r>
-              <a:rPr lang="en-IN" sz="1600" b="1" i="0" u="none" strike="noStrike" cap="none" dirty="0">
-                <a:solidFill>
-                  <a:srgbClr val="081271"/>
-                </a:solidFill>
-                <a:latin typeface="Times New Roman"/>
-                <a:ea typeface="Times New Roman"/>
-                <a:cs typeface="Times New Roman"/>
-                <a:sym typeface="Times New Roman"/>
-              </a:rPr>
-              <a:t>[Final Project Review]</a:t>
-            </a:r>
-            <a:r>
-              <a:rPr lang="en-IN" sz="1600" b="1" dirty="0">
-                <a:solidFill>
-                  <a:srgbClr val="081271"/>
-                </a:solidFill>
-                <a:latin typeface="Times New Roman"/>
-                <a:ea typeface="Times New Roman"/>
-                <a:cs typeface="Times New Roman"/>
-                <a:sym typeface="Times New Roman"/>
-              </a:rPr>
-              <a:t/>
-            </a:r>
-            <a:r>
-              <a:rPr lang="en-IN" sz="1600" b="1" i="0" u="none" strike="noStrike" cap="none" dirty="0">
-                <a:solidFill>
-                  <a:srgbClr val="081271"/>
-                </a:solidFill>
-                <a:latin typeface="Times New Roman"/>
-                <a:ea typeface="Times New Roman"/>
-                <a:cs typeface="Times New Roman"/>
-                <a:sym typeface="Times New Roman"/>
-              </a:rPr>
-              <a:t/>
-            </a:r>
-            <a:endParaRPr sz="1600" b="1" i="0" u="none" strike="noStrike" cap="none" dirty="0">
-              <a:solidFill>
-                <a:srgbClr val="081271"/>
-              </a:solidFill>
-              <a:latin typeface="Times New Roman"/>
-              <a:ea typeface="Times New Roman"/>
-              <a:cs typeface="Times New Roman"/>
-              <a:sym typeface="Times New Roman"/>
-            </a:endParaRPr>
-          </a:p>
-        </p:txBody>
-      </p:sp>
-      <p:cxnSp>
-        <p:nvCxnSpPr>
-          <p:cNvPr id="16" name="Straight Connector 15">
-            <a:extLst>
-              <a:ext uri="{FF2B5EF4-FFF2-40B4-BE49-F238E27FC236}">
-                <a16:creationId xmlns:a16="http://schemas.microsoft.com/office/drawing/2014/main" id="{170CA935-25F2-6478-C664-35BFDF7E813C}"/>
-              </a:ext>
-            </a:extLst>
-          </p:cNvPr>
-          <p:cNvCxnSpPr/>
-          <p:nvPr/>
-        </p:nvCxnSpPr>
-        <p:spPr>
-          <a:xfrm>
-            <a:off x="0" y="1260899"/>
-            <a:ext cx="12192000" cy="0"/>
-          </a:xfrm>
-          <a:prstGeom prst="line">
-            <a:avLst/>
-          </a:prstGeom>
-          <a:ln w="28575">
-            <a:solidFill>
-              <a:srgbClr val="1A9B46"/>
-            </a:solidFill>
-          </a:ln>
-        </p:spPr>
-        <p:style>
-          <a:lnRef idx="1">
-            <a:schemeClr val="accent1"/>
-          </a:lnRef>
-          <a:fillRef idx="0">
-            <a:schemeClr val="accent1"/>
-          </a:fillRef>
-          <a:effectRef idx="0">
-            <a:schemeClr val="accent1"/>
-          </a:effectRef>
-          <a:fontRef idx="minor">
-            <a:schemeClr val="tx1"/>
-          </a:fontRef>
-        </p:style>
-      </p:cxnSp>
-      <p:sp>
-        <p:nvSpPr>
-          <p:cNvPr id="2" name="Title 1"/>
-          <p:cNvSpPr>
-            <a:spLocks noGrp="1"/>
-          </p:cNvSpPr>
-          <p:nvPr>
-            <p:ph type="title"/>
-          </p:nvPr>
-        </p:nvSpPr>
-        <p:spPr/>
-        <p:txBody>
-          <a:bodyPr/>
-          <a:lstStyle/>
-          <a:p>
-            <a:r>
-              <a:rPr sz="3200"/>
               <a:t>Classical Baselines and a Fair Evaluation</a:t>
             </a:r>
           </a:p>
@@ -17578,7 +15510,7 @@
 </p:sld>
 </file>
 
-<file path=ppt/slides/slide29.xml><?xml version="1.0" encoding="utf-8"?>
+<file path=ppt/slides/slide27.xml><?xml version="1.0" encoding="utf-8"?>
 <p:sld xmlns:a="http://schemas.openxmlformats.org/drawingml/2006/main" xmlns:p="http://schemas.openxmlformats.org/presentationml/2006/main" xmlns:r="http://schemas.openxmlformats.org/officeDocument/2006/relationships">
   <p:cSld>
     <p:spTree>
@@ -17957,7 +15889,7 @@
 </p:sld>
 </file>
 
-<file path=ppt/slides/slide30.xml><?xml version="1.0" encoding="utf-8"?>
+<file path=ppt/slides/slide28.xml><?xml version="1.0" encoding="utf-8"?>
 <p:sld xmlns:a="http://schemas.openxmlformats.org/drawingml/2006/main" xmlns:p="http://schemas.openxmlformats.org/presentationml/2006/main" xmlns:r="http://schemas.openxmlformats.org/officeDocument/2006/relationships">
   <p:cSld>
     <p:spTree>
@@ -18971,7 +16903,7 @@
 </p:sld>
 </file>
 
-<file path=ppt/slides/slide31.xml><?xml version="1.0" encoding="utf-8"?>
+<file path=ppt/slides/slide29.xml><?xml version="1.0" encoding="utf-8"?>
 <p:sld xmlns:a="http://schemas.openxmlformats.org/drawingml/2006/main" xmlns:p="http://schemas.openxmlformats.org/presentationml/2006/main" xmlns:r="http://schemas.openxmlformats.org/officeDocument/2006/relationships">
   <p:cSld>
     <p:spTree>
@@ -19236,7 +17168,7 @@
           <a:p>
             <a:r>
               <a:rPr sz="3200"/>
-              <a:t>Dashboard (1/7): Episode View, Engine</a:t>
+              <a:t>Dashboard (1/5): Episode View, Engine</a:t>
             </a:r>
           </a:p>
         </p:txBody>
@@ -19778,7 +17710,7 @@
 </p:sld>
 </file>
 
-<file path=ppt/slides/slide32.xml><?xml version="1.0" encoding="utf-8"?>
+<file path=ppt/slides/slide30.xml><?xml version="1.0" encoding="utf-8"?>
 <p:sld xmlns:a="http://schemas.openxmlformats.org/drawingml/2006/main" xmlns:p="http://schemas.openxmlformats.org/presentationml/2006/main" xmlns:r="http://schemas.openxmlformats.org/officeDocument/2006/relationships">
   <p:cSld>
     <p:spTree>
@@ -20043,7 +17975,7 @@
           <a:p>
             <a:r>
               <a:rPr sz="3200"/>
-              <a:t>Dashboard (2/7): The Challenger, and a Crisis</a:t>
+              <a:t>Dashboard (2/5): The Challenger, and a Crisis</a:t>
             </a:r>
           </a:p>
         </p:txBody>
@@ -20287,7 +18219,7 @@
 </p:sld>
 </file>
 
-<file path=ppt/slides/slide33.xml><?xml version="1.0" encoding="utf-8"?>
+<file path=ppt/slides/slide31.xml><?xml version="1.0" encoding="utf-8"?>
 <p:sld xmlns:a="http://schemas.openxmlformats.org/drawingml/2006/main" xmlns:p="http://schemas.openxmlformats.org/presentationml/2006/main" xmlns:r="http://schemas.openxmlformats.org/officeDocument/2006/relationships">
   <p:cSld>
     <p:spTree>
@@ -20552,7 +18484,7 @@
           <a:p>
             <a:r>
               <a:rPr sz="3200"/>
-              <a:t>Dashboard (3/7): Before vs After the System</a:t>
+              <a:t>Dashboard (3/5): Before vs After the System</a:t>
             </a:r>
           </a:p>
         </p:txBody>
@@ -21004,7 +18936,7 @@
 </p:sld>
 </file>
 
-<file path=ppt/slides/slide34.xml><?xml version="1.0" encoding="utf-8"?>
+<file path=ppt/slides/slide32.xml><?xml version="1.0" encoding="utf-8"?>
 <p:sld xmlns:a="http://schemas.openxmlformats.org/drawingml/2006/main" xmlns:p="http://schemas.openxmlformats.org/presentationml/2006/main" xmlns:r="http://schemas.openxmlformats.org/officeDocument/2006/relationships">
   <p:cSld>
     <p:spTree>
@@ -21269,7 +19201,7 @@
           <a:p>
             <a:r>
               <a:rPr sz="3200"/>
-              <a:t>Dashboard (4/7): Every Test Run, Not Just the Average</a:t>
+              <a:t>Dashboard (4/5): Explain a Decision</a:t>
             </a:r>
           </a:p>
         </p:txBody>
@@ -21305,7 +19237,7 @@
       </p:sp>
       <p:pic>
         <p:nvPicPr>
-          <p:cNvPr id="20" name="Picture 19" descr="_crop_before_after_90093155.png"/>
+          <p:cNvPr id="20" name="Picture 19" descr="_crop_explain_13376534.png"/>
           <p:cNvPicPr>
             <a:picLocks noChangeAspect="1"/>
           </p:cNvPicPr>
@@ -21319,8 +19251,8 @@
         </p:blipFill>
         <p:spPr>
           <a:xfrm>
-            <a:off x="1115567" y="1325880"/>
-            <a:ext cx="9957816" cy="3319272"/>
+            <a:off x="675885" y="1371600"/>
+            <a:ext cx="6877828" cy="2816352"/>
           </a:xfrm>
           <a:prstGeom prst="rect">
             <a:avLst/>
@@ -21340,8 +19272,8 @@
         </p:nvSpPr>
         <p:spPr>
           <a:xfrm>
-            <a:off x="411480" y="4672584"/>
-            <a:ext cx="11365992" cy="292608"/>
+            <a:off x="411480" y="4215384"/>
+            <a:ext cx="7406640" cy="292608"/>
           </a:xfrm>
           <a:prstGeom prst="rect">
             <a:avLst/>
@@ -21366,7 +19298,7 @@
                 </a:solidFill>
                 <a:latin typeface="Calibri"/>
               </a:rPr>
-              <a:t>Each dot is one of the 30 held-out test seeds, sorted by the “before” profit</a:t>
+              <a:t>Day 45, product 0: explanation written by the LLM, source shown as a badge</a:t>
             </a:r>
           </a:p>
         </p:txBody>
@@ -21379,8 +19311,8 @@
         </p:nvSpPr>
         <p:spPr>
           <a:xfrm>
-            <a:off x="411480" y="5074920"/>
-            <a:ext cx="11365992" cy="1280160"/>
+            <a:off x="8092440" y="1371600"/>
+            <a:ext cx="3685032" cy="4937760"/>
           </a:xfrm>
           <a:prstGeom prst="rect">
             <a:avLst/>
@@ -21395,26 +19327,17 @@
           <a:p>
             <a:pPr algn="l">
               <a:spcAft>
-                <a:spcPts val="600"/>
+                <a:spcPts val="400"/>
               </a:spcAft>
             </a:pPr>
             <a:r>
-              <a:rPr sz="1600" b="1" i="0">
+              <a:rPr sz="1700" b="1" i="0">
                 <a:solidFill>
                   <a:srgbClr val="1B5E3A"/>
                 </a:solidFill>
                 <a:latin typeface="Calibri"/>
               </a:rPr>
-              <a:t>•  Why show every run? </a:t>
-            </a:r>
-            <a:r>
-              <a:rPr sz="1600" b="0" i="0">
-                <a:solidFill>
-                  <a:srgbClr val="1F2937"/>
-                </a:solidFill>
-                <a:latin typeface="Calibri"/>
-              </a:rPr>
-              <a:t>An average can hide losses. The engine (green) is above the fixed order (grey) on 30 of 30 seeds; the RL challenger (pink) is above it on 29 of 30.</a:t>
+              <a:t>How to use it</a:t>
             </a:r>
           </a:p>
           <a:p>
@@ -21424,22 +19347,125 @@
               </a:spcAft>
             </a:pPr>
             <a:r>
-              <a:rPr sz="1600" b="1" i="0">
+              <a:rPr sz="1400" b="0" i="0">
+                <a:solidFill>
+                  <a:srgbClr val="1F2937"/>
+                </a:solidFill>
+                <a:latin typeface="Calibri"/>
+              </a:rPr>
+              <a:t>•  Pick a day and a product</a:t>
+            </a:r>
+          </a:p>
+          <a:p>
+            <a:pPr algn="l">
+              <a:spcAft>
+                <a:spcPts val="400"/>
+              </a:spcAft>
+            </a:pPr>
+            <a:r>
+              <a:rPr sz="1400" b="0" i="0">
+                <a:solidFill>
+                  <a:srgbClr val="1F2937"/>
+                </a:solidFill>
+                <a:latin typeface="Calibri"/>
+              </a:rPr>
+              <a:t>•  Press Explain this decision</a:t>
+            </a:r>
+          </a:p>
+          <a:p>
+            <a:pPr algn="l">
+              <a:spcAft>
+                <a:spcPts val="400"/>
+              </a:spcAft>
+            </a:pPr>
+            <a:r>
+              <a:rPr sz="1400" b="0" i="0">
+                <a:solidFill>
+                  <a:srgbClr val="1F2937"/>
+                </a:solidFill>
+                <a:latin typeface="Calibri"/>
+              </a:rPr>
+              <a:t>•  Read 2–3 plain sentences</a:t>
+            </a:r>
+          </a:p>
+          <a:p>
+            <a:pPr algn="l">
+              <a:spcAft>
+                <a:spcPts val="400"/>
+              </a:spcAft>
+            </a:pPr>
+            <a:r>
+              <a:rPr sz="1400" b="0" i="0">
+                <a:solidFill>
+                  <a:srgbClr val="1F2937"/>
+                </a:solidFill>
+                <a:latin typeface="Calibri"/>
+              </a:rPr>
+              <a:t>•  The black badge shows who wrote it: a model name, or “deterministic template” if the check rejected the LLM</a:t>
+            </a:r>
+          </a:p>
+          <a:p>
+            <a:pPr algn="l">
+              <a:spcAft>
+                <a:spcPts val="400"/>
+              </a:spcAft>
+            </a:pPr>
+            <a:r>
+              <a:rPr sz="1400" b="0" i="0">
+                <a:solidFill>
+                  <a:srgbClr val="1F2937"/>
+                </a:solidFill>
+                <a:latin typeface="Calibri"/>
+              </a:rPr>
+              <a:t>•  Expand “the facts the model was given” to verify every number</a:t>
+            </a:r>
+          </a:p>
+        </p:txBody>
+      </p:sp>
+      <p:sp>
+        <p:nvSpPr>
+          <p:cNvPr id="23" name="TextBox 22"/>
+          <p:cNvSpPr txBox="1"/>
+          <p:nvPr/>
+        </p:nvSpPr>
+        <p:spPr>
+          <a:xfrm>
+            <a:off x="411480" y="4709160"/>
+            <a:ext cx="7406640" cy="1554480"/>
+          </a:xfrm>
+          <a:prstGeom prst="rect">
+            <a:avLst/>
+          </a:prstGeom>
+          <a:noFill/>
+        </p:spPr>
+        <p:txBody>
+          <a:bodyPr wrap="square" anchor="t" lIns="45720" rIns="45720" tIns="27432" bIns="27432">
+            <a:spAutoFit/>
+          </a:bodyPr>
+          <a:lstStyle/>
+          <a:p>
+            <a:pPr algn="l">
+              <a:spcAft>
+                <a:spcPts val="400"/>
+              </a:spcAft>
+            </a:pPr>
+            <a:r>
+              <a:rPr sz="1400" b="1" i="0">
                 <a:solidFill>
                   <a:srgbClr val="D6336C"/>
                 </a:solidFill>
                 <a:latin typeface="Calibri"/>
               </a:rPr>
-              <a:t>•  One weak run is visible too: </a:t>
-            </a:r>
-            <a:r>
-              <a:rPr sz="1600" b="0" i="0">
+              <a:t>Check it yourself: </a:t>
+            </a:r>
+            <a:r>
+              <a:rPr sz="1400" b="0" i="0">
                 <a:solidFill>
                   <a:srgbClr val="1F2937"/>
                 </a:solidFill>
                 <a:latin typeface="Calibri"/>
               </a:rPr>
-              <a:t>the lone pink dot far below the others is a seed where the challenger did badly.</a:t>
+              <a:t>2,365 units, 14.0 days of cover, demand of 169 units and a 7-day average of 78 all appear in the facts panel. If the model had invented a figure, the template would have replaced this text.</a:t>
             </a:r>
           </a:p>
         </p:txBody>
@@ -21452,7 +19478,7 @@
 </p:sld>
 </file>
 
-<file path=ppt/slides/slide35.xml><?xml version="1.0" encoding="utf-8"?>
+<file path=ppt/slides/slide33.xml><?xml version="1.0" encoding="utf-8"?>
 <p:sld xmlns:a="http://schemas.openxmlformats.org/drawingml/2006/main" xmlns:p="http://schemas.openxmlformats.org/presentationml/2006/main" xmlns:r="http://schemas.openxmlformats.org/officeDocument/2006/relationships">
   <p:cSld>
     <p:spTree>
@@ -21717,1050 +19743,7 @@
           <a:p>
             <a:r>
               <a:rPr sz="3200"/>
-              <a:t>Dashboard (5/7): One Run, Day by Day</a:t>
-            </a:r>
-          </a:p>
-        </p:txBody>
-      </p:sp>
-      <p:sp>
-        <p:nvSpPr>
-          <p:cNvPr id="19" name="Slide Number Placeholder 18">
-            <a:extLst>
-              <a:ext uri="{FF2B5EF4-FFF2-40B4-BE49-F238E27FC236}">
-                <a16:creationId xmlns:a16="http://schemas.microsoft.com/office/drawing/2014/main" id="{9B6D94B3-8D6F-6862-5C85-C28EA1FEBFFD}"/>
-              </a:ext>
-            </a:extLst>
-          </p:cNvPr>
-          <p:cNvSpPr>
-            <a:spLocks noGrp="1"/>
-          </p:cNvSpPr>
-          <p:nvPr>
-            <p:ph type="sldNum" sz="quarter" idx="12"/>
-          </p:nvPr>
-        </p:nvSpPr>
-        <p:spPr/>
-        <p:txBody>
-          <a:bodyPr/>
-          <a:lstStyle/>
-          <a:p>
-            <a:fld id="{C2216105-7B7A-4C42-B2A1-5E9A2FA4F8FD}" type="slidenum">
-              <a:rPr lang="en-IN" smtClean="0"/>
-              <a:t>3</a:t>
-            </a:fld>
-            <a:endParaRPr lang="en-IN" dirty="0"/>
-          </a:p>
-        </p:txBody>
-      </p:sp>
-      <p:pic>
-        <p:nvPicPr>
-          <p:cNvPr id="20" name="Picture 19" descr="_crop_before_after_57854471.png"/>
-          <p:cNvPicPr>
-            <a:picLocks noChangeAspect="1"/>
-          </p:cNvPicPr>
-          <p:nvPr/>
-        </p:nvPicPr>
-        <p:blipFill>
-          <a:blip r:embed="rId2"/>
-          <a:stretch>
-            <a:fillRect/>
-          </a:stretch>
-        </p:blipFill>
-        <p:spPr>
-          <a:xfrm>
-            <a:off x="672832" y="1325880"/>
-            <a:ext cx="7158255" cy="3364992"/>
-          </a:xfrm>
-          <a:prstGeom prst="rect">
-            <a:avLst/>
-          </a:prstGeom>
-          <a:ln w="12700">
-            <a:solidFill>
-              <a:srgbClr val="CBD5E1"/>
-            </a:solidFill>
-          </a:ln>
-        </p:spPr>
-      </p:pic>
-      <p:sp>
-        <p:nvSpPr>
-          <p:cNvPr id="21" name="TextBox 20"/>
-          <p:cNvSpPr txBox="1"/>
-          <p:nvPr/>
-        </p:nvSpPr>
-        <p:spPr>
-          <a:xfrm>
-            <a:off x="411480" y="4718304"/>
-            <a:ext cx="7680960" cy="292608"/>
-          </a:xfrm>
-          <a:prstGeom prst="rect">
-            <a:avLst/>
-          </a:prstGeom>
-          <a:noFill/>
-        </p:spPr>
-        <p:txBody>
-          <a:bodyPr wrap="square" anchor="t" lIns="45720" rIns="45720" tIns="27432" bIns="27432">
-            <a:spAutoFit/>
-          </a:bodyPr>
-          <a:lstStyle/>
-          <a:p>
-            <a:pPr algn="ctr">
-              <a:spcAft>
-                <a:spcPts val="400"/>
-              </a:spcAft>
-            </a:pPr>
-            <a:r>
-              <a:rPr sz="1200" b="0" i="0">
-                <a:solidFill>
-                  <a:srgbClr val="5B6573"/>
-                </a:solidFill>
-                <a:latin typeface="Calibri"/>
-              </a:rPr>
-              <a:t>Seed 500: cumulative profit and stockouts, before vs after</a:t>
-            </a:r>
-          </a:p>
-        </p:txBody>
-      </p:sp>
-      <p:sp>
-        <p:nvSpPr>
-          <p:cNvPr id="22" name="TextBox 21"/>
-          <p:cNvSpPr txBox="1"/>
-          <p:nvPr/>
-        </p:nvSpPr>
-        <p:spPr>
-          <a:xfrm>
-            <a:off x="8366759" y="1371600"/>
-            <a:ext cx="3410712" cy="4846320"/>
-          </a:xfrm>
-          <a:prstGeom prst="rect">
-            <a:avLst/>
-          </a:prstGeom>
-          <a:noFill/>
-        </p:spPr>
-        <p:txBody>
-          <a:bodyPr wrap="square" anchor="t" lIns="45720" rIns="45720" tIns="27432" bIns="27432">
-            <a:spAutoFit/>
-          </a:bodyPr>
-          <a:lstStyle/>
-          <a:p>
-            <a:pPr algn="l">
-              <a:spcAft>
-                <a:spcPts val="600"/>
-              </a:spcAft>
-            </a:pPr>
-            <a:r>
-              <a:rPr sz="1800" b="1" i="0">
-                <a:solidFill>
-                  <a:srgbClr val="1B5E3A"/>
-                </a:solidFill>
-                <a:latin typeface="Calibri"/>
-              </a:rPr>
-              <a:t>Reading the charts</a:t>
-            </a:r>
-          </a:p>
-          <a:p>
-            <a:pPr algn="l">
-              <a:spcAft>
-                <a:spcPts val="600"/>
-              </a:spcAft>
-            </a:pPr>
-            <a:r>
-              <a:rPr sz="1500" b="0" i="0">
-                <a:solidFill>
-                  <a:srgbClr val="1F2937"/>
-                </a:solidFill>
-                <a:latin typeface="Calibri"/>
-              </a:rPr>
-              <a:t>•  Left: profit builds up over 180 days. Green (engine) pulls away from grey (fixed order).</a:t>
-            </a:r>
-          </a:p>
-          <a:p>
-            <a:pPr algn="l">
-              <a:spcAft>
-                <a:spcPts val="600"/>
-              </a:spcAft>
-            </a:pPr>
-            <a:r>
-              <a:rPr sz="1500" b="0" i="0">
-                <a:solidFill>
-                  <a:srgbClr val="1F2937"/>
-                </a:solidFill>
-                <a:latin typeface="Calibri"/>
-              </a:rPr>
-              <a:t>•  Right: product-days out of stock, counted up. The engine stays low; the fixed order and the challenger climb.</a:t>
-            </a:r>
-          </a:p>
-          <a:p>
-            <a:pPr algn="l">
-              <a:spcAft>
-                <a:spcPts val="400"/>
-              </a:spcAft>
-            </a:pPr>
-            <a:r>
-              <a:rPr sz="1500" b="0" i="0">
-                <a:solidFill>
-                  <a:srgbClr val="1F2937"/>
-                </a:solidFill>
-                <a:latin typeface="Calibri"/>
-              </a:rPr>
-              <a:t>•  The charts follow the sidebar’s seed and crisis switch, so before and after can be compared live under any condition.</a:t>
-            </a:r>
-          </a:p>
-        </p:txBody>
-      </p:sp>
-      <p:sp>
-        <p:nvSpPr>
-          <p:cNvPr id="23" name="TextBox 22"/>
-          <p:cNvSpPr txBox="1"/>
-          <p:nvPr/>
-        </p:nvSpPr>
-        <p:spPr>
-          <a:xfrm>
-            <a:off x="411480" y="5166360"/>
-            <a:ext cx="7680960" cy="1097280"/>
-          </a:xfrm>
-          <a:prstGeom prst="rect">
-            <a:avLst/>
-          </a:prstGeom>
-          <a:noFill/>
-        </p:spPr>
-        <p:txBody>
-          <a:bodyPr wrap="square" anchor="t" lIns="45720" rIns="45720" tIns="27432" bIns="27432">
-            <a:spAutoFit/>
-          </a:bodyPr>
-          <a:lstStyle/>
-          <a:p>
-            <a:pPr algn="l">
-              <a:spcAft>
-                <a:spcPts val="400"/>
-              </a:spcAft>
-            </a:pPr>
-            <a:r>
-              <a:rPr sz="1500" b="1" i="0">
-                <a:solidFill>
-                  <a:srgbClr val="D6336C"/>
-                </a:solidFill>
-                <a:latin typeface="Calibri"/>
-              </a:rPr>
-              <a:t>On this single run the challenger runs out of stock more than the engine: a visible example of its weakness.</a:t>
-            </a:r>
-          </a:p>
-        </p:txBody>
-      </p:sp>
-    </p:spTree>
-  </p:cSld>
-  <p:clrMapOvr>
-    <a:masterClrMapping/>
-  </p:clrMapOvr>
-</p:sld>
-</file>
-
-<file path=ppt/slides/slide36.xml><?xml version="1.0" encoding="utf-8"?>
-<p:sld xmlns:a="http://schemas.openxmlformats.org/drawingml/2006/main" xmlns:p="http://schemas.openxmlformats.org/presentationml/2006/main" xmlns:r="http://schemas.openxmlformats.org/officeDocument/2006/relationships">
-  <p:cSld>
-    <p:spTree>
-      <p:nvGrpSpPr>
-        <p:cNvPr id="1" name=""/>
-        <p:cNvGrpSpPr/>
-        <p:nvPr/>
-      </p:nvGrpSpPr>
-      <p:grpSpPr/>
-      <p:sp>
-        <p:nvSpPr>
-          <p:cNvPr id="17" name="Rectangle 16">
-            <a:extLst>
-              <a:ext uri="{FF2B5EF4-FFF2-40B4-BE49-F238E27FC236}">
-                <a16:creationId xmlns:a16="http://schemas.microsoft.com/office/drawing/2014/main" id="{684365C9-E666-36EE-4DB1-04791BFC26FB}"/>
-              </a:ext>
-            </a:extLst>
-          </p:cNvPr>
-          <p:cNvSpPr/>
-          <p:nvPr/>
-        </p:nvSpPr>
-        <p:spPr>
-          <a:xfrm>
-            <a:off x="-1" y="0"/>
-            <a:ext cx="12191998" cy="1262131"/>
-          </a:xfrm>
-          <a:prstGeom prst="rect">
-            <a:avLst/>
-          </a:prstGeom>
-          <a:gradFill flip="none" rotWithShape="1">
-            <a:gsLst>
-              <a:gs pos="0">
-                <a:srgbClr val="1A9B46">
-                  <a:tint val="66000"/>
-                  <a:satMod val="160000"/>
-                </a:srgbClr>
-              </a:gs>
-              <a:gs pos="50000">
-                <a:srgbClr val="1A9B46">
-                  <a:tint val="44500"/>
-                  <a:satMod val="160000"/>
-                </a:srgbClr>
-              </a:gs>
-              <a:gs pos="100000">
-                <a:srgbClr val="1A9B46">
-                  <a:tint val="23500"/>
-                  <a:satMod val="160000"/>
-                </a:srgbClr>
-              </a:gs>
-            </a:gsLst>
-            <a:path path="circle">
-              <a:fillToRect l="50000" t="50000" r="50000" b="50000"/>
-            </a:path>
-            <a:tileRect/>
-          </a:gradFill>
-          <a:ln>
-            <a:noFill/>
-          </a:ln>
-        </p:spPr>
-        <p:style>
-          <a:lnRef idx="2">
-            <a:schemeClr val="accent1">
-              <a:shade val="50000"/>
-            </a:schemeClr>
-          </a:lnRef>
-          <a:fillRef idx="1">
-            <a:schemeClr val="accent1"/>
-          </a:fillRef>
-          <a:effectRef idx="0">
-            <a:schemeClr val="accent1"/>
-          </a:effectRef>
-          <a:fontRef idx="minor">
-            <a:schemeClr val="lt1"/>
-          </a:fontRef>
-        </p:style>
-        <p:txBody>
-          <a:bodyPr rtlCol="0" anchor="ctr"/>
-          <a:lstStyle/>
-          <a:p>
-            <a:pPr algn="ctr"/>
-            <a:endParaRPr lang="en-IN" sz="4400" dirty="0">
-              <a:solidFill>
-                <a:schemeClr val="accent1">
-                  <a:lumMod val="50000"/>
-                </a:schemeClr>
-              </a:solidFill>
-            </a:endParaRPr>
-          </a:p>
-        </p:txBody>
-      </p:sp>
-      <p:sp>
-        <p:nvSpPr>
-          <p:cNvPr id="10" name="Google Shape;91;p1">
-            <a:extLst>
-              <a:ext uri="{FF2B5EF4-FFF2-40B4-BE49-F238E27FC236}">
-                <a16:creationId xmlns:a16="http://schemas.microsoft.com/office/drawing/2014/main" id="{4D89FC00-7640-2DC1-0BAF-6A1DC613CF6B}"/>
-              </a:ext>
-            </a:extLst>
-          </p:cNvPr>
-          <p:cNvSpPr txBox="1"/>
-          <p:nvPr/>
-        </p:nvSpPr>
-        <p:spPr>
-          <a:xfrm>
-            <a:off x="-1" y="6416040"/>
-            <a:ext cx="12191998" cy="441960"/>
-          </a:xfrm>
-          <a:prstGeom prst="rect">
-            <a:avLst/>
-          </a:prstGeom>
-          <a:gradFill flip="none" rotWithShape="1">
-            <a:gsLst>
-              <a:gs pos="0">
-                <a:srgbClr val="1A9B46">
-                  <a:tint val="66000"/>
-                  <a:satMod val="160000"/>
-                </a:srgbClr>
-              </a:gs>
-              <a:gs pos="50000">
-                <a:srgbClr val="1A9B46">
-                  <a:tint val="44500"/>
-                  <a:satMod val="160000"/>
-                </a:srgbClr>
-              </a:gs>
-              <a:gs pos="100000">
-                <a:srgbClr val="1A9B46">
-                  <a:tint val="23500"/>
-                  <a:satMod val="160000"/>
-                </a:srgbClr>
-              </a:gs>
-            </a:gsLst>
-            <a:path path="circle">
-              <a:fillToRect l="50000" t="50000" r="50000" b="50000"/>
-            </a:path>
-            <a:tileRect/>
-          </a:gradFill>
-          <a:ln>
-            <a:noFill/>
-          </a:ln>
-        </p:spPr>
-        <p:txBody>
-          <a:bodyPr spcFirstLastPara="1" wrap="square" lIns="91425" tIns="45700" rIns="91425" bIns="45700" anchor="t" anchorCtr="0">
-            <a:noAutofit/>
-          </a:bodyPr>
-          <a:lstStyle/>
-          <a:p>
-            <a:pPr marL="0" marR="0" lvl="0" indent="0" algn="ctr" rtl="0">
-              <a:lnSpc>
-                <a:spcPct val="90000"/>
-              </a:lnSpc>
-              <a:spcBef>
-                <a:spcPts val="0"/>
-              </a:spcBef>
-              <a:spcAft>
-                <a:spcPts val="0"/>
-              </a:spcAft>
-              <a:buNone/>
-            </a:pPr>
-            <a:r>
-              <a:rPr lang="en-IN" sz="1600" b="1" i="0" u="none" strike="noStrike" cap="none" dirty="0">
-                <a:solidFill>
-                  <a:srgbClr val="081271"/>
-                </a:solidFill>
-                <a:latin typeface="Times New Roman"/>
-                <a:ea typeface="Times New Roman"/>
-                <a:cs typeface="Times New Roman"/>
-                <a:sym typeface="Times New Roman"/>
-              </a:rPr>
-              <a:t>[Final Project Review]</a:t>
-            </a:r>
-            <a:r>
-              <a:rPr lang="en-IN" sz="1600" b="1" dirty="0">
-                <a:solidFill>
-                  <a:srgbClr val="081271"/>
-                </a:solidFill>
-                <a:latin typeface="Times New Roman"/>
-                <a:ea typeface="Times New Roman"/>
-                <a:cs typeface="Times New Roman"/>
-                <a:sym typeface="Times New Roman"/>
-              </a:rPr>
-              <a:t/>
-            </a:r>
-            <a:r>
-              <a:rPr lang="en-IN" sz="1600" b="1" i="0" u="none" strike="noStrike" cap="none" dirty="0">
-                <a:solidFill>
-                  <a:srgbClr val="081271"/>
-                </a:solidFill>
-                <a:latin typeface="Times New Roman"/>
-                <a:ea typeface="Times New Roman"/>
-                <a:cs typeface="Times New Roman"/>
-                <a:sym typeface="Times New Roman"/>
-              </a:rPr>
-              <a:t/>
-            </a:r>
-            <a:endParaRPr sz="1600" b="1" i="0" u="none" strike="noStrike" cap="none" dirty="0">
-              <a:solidFill>
-                <a:srgbClr val="081271"/>
-              </a:solidFill>
-              <a:latin typeface="Times New Roman"/>
-              <a:ea typeface="Times New Roman"/>
-              <a:cs typeface="Times New Roman"/>
-              <a:sym typeface="Times New Roman"/>
-            </a:endParaRPr>
-          </a:p>
-        </p:txBody>
-      </p:sp>
-      <p:cxnSp>
-        <p:nvCxnSpPr>
-          <p:cNvPr id="16" name="Straight Connector 15">
-            <a:extLst>
-              <a:ext uri="{FF2B5EF4-FFF2-40B4-BE49-F238E27FC236}">
-                <a16:creationId xmlns:a16="http://schemas.microsoft.com/office/drawing/2014/main" id="{170CA935-25F2-6478-C664-35BFDF7E813C}"/>
-              </a:ext>
-            </a:extLst>
-          </p:cNvPr>
-          <p:cNvCxnSpPr/>
-          <p:nvPr/>
-        </p:nvCxnSpPr>
-        <p:spPr>
-          <a:xfrm>
-            <a:off x="0" y="1260899"/>
-            <a:ext cx="12192000" cy="0"/>
-          </a:xfrm>
-          <a:prstGeom prst="line">
-            <a:avLst/>
-          </a:prstGeom>
-          <a:ln w="28575">
-            <a:solidFill>
-              <a:srgbClr val="1A9B46"/>
-            </a:solidFill>
-          </a:ln>
-        </p:spPr>
-        <p:style>
-          <a:lnRef idx="1">
-            <a:schemeClr val="accent1"/>
-          </a:lnRef>
-          <a:fillRef idx="0">
-            <a:schemeClr val="accent1"/>
-          </a:fillRef>
-          <a:effectRef idx="0">
-            <a:schemeClr val="accent1"/>
-          </a:effectRef>
-          <a:fontRef idx="minor">
-            <a:schemeClr val="tx1"/>
-          </a:fontRef>
-        </p:style>
-      </p:cxnSp>
-      <p:sp>
-        <p:nvSpPr>
-          <p:cNvPr id="2" name="Title 1"/>
-          <p:cNvSpPr>
-            <a:spLocks noGrp="1"/>
-          </p:cNvSpPr>
-          <p:nvPr>
-            <p:ph type="title"/>
-          </p:nvPr>
-        </p:nvSpPr>
-        <p:spPr/>
-        <p:txBody>
-          <a:bodyPr/>
-          <a:lstStyle/>
-          <a:p>
-            <a:r>
-              <a:rPr sz="3200"/>
-              <a:t>Dashboard (6/7): Explain a Decision</a:t>
-            </a:r>
-          </a:p>
-        </p:txBody>
-      </p:sp>
-      <p:sp>
-        <p:nvSpPr>
-          <p:cNvPr id="19" name="Slide Number Placeholder 18">
-            <a:extLst>
-              <a:ext uri="{FF2B5EF4-FFF2-40B4-BE49-F238E27FC236}">
-                <a16:creationId xmlns:a16="http://schemas.microsoft.com/office/drawing/2014/main" id="{9B6D94B3-8D6F-6862-5C85-C28EA1FEBFFD}"/>
-              </a:ext>
-            </a:extLst>
-          </p:cNvPr>
-          <p:cNvSpPr>
-            <a:spLocks noGrp="1"/>
-          </p:cNvSpPr>
-          <p:nvPr>
-            <p:ph type="sldNum" sz="quarter" idx="12"/>
-          </p:nvPr>
-        </p:nvSpPr>
-        <p:spPr/>
-        <p:txBody>
-          <a:bodyPr/>
-          <a:lstStyle/>
-          <a:p>
-            <a:fld id="{C2216105-7B7A-4C42-B2A1-5E9A2FA4F8FD}" type="slidenum">
-              <a:rPr lang="en-IN" smtClean="0"/>
-              <a:t>3</a:t>
-            </a:fld>
-            <a:endParaRPr lang="en-IN" dirty="0"/>
-          </a:p>
-        </p:txBody>
-      </p:sp>
-      <p:pic>
-        <p:nvPicPr>
-          <p:cNvPr id="20" name="Picture 19" descr="_crop_explain_13376534.png"/>
-          <p:cNvPicPr>
-            <a:picLocks noChangeAspect="1"/>
-          </p:cNvPicPr>
-          <p:nvPr/>
-        </p:nvPicPr>
-        <p:blipFill>
-          <a:blip r:embed="rId2"/>
-          <a:stretch>
-            <a:fillRect/>
-          </a:stretch>
-        </p:blipFill>
-        <p:spPr>
-          <a:xfrm>
-            <a:off x="675885" y="1371600"/>
-            <a:ext cx="6877828" cy="2816352"/>
-          </a:xfrm>
-          <a:prstGeom prst="rect">
-            <a:avLst/>
-          </a:prstGeom>
-          <a:ln w="12700">
-            <a:solidFill>
-              <a:srgbClr val="CBD5E1"/>
-            </a:solidFill>
-          </a:ln>
-        </p:spPr>
-      </p:pic>
-      <p:sp>
-        <p:nvSpPr>
-          <p:cNvPr id="21" name="TextBox 20"/>
-          <p:cNvSpPr txBox="1"/>
-          <p:nvPr/>
-        </p:nvSpPr>
-        <p:spPr>
-          <a:xfrm>
-            <a:off x="411480" y="4215384"/>
-            <a:ext cx="7406640" cy="292608"/>
-          </a:xfrm>
-          <a:prstGeom prst="rect">
-            <a:avLst/>
-          </a:prstGeom>
-          <a:noFill/>
-        </p:spPr>
-        <p:txBody>
-          <a:bodyPr wrap="square" anchor="t" lIns="45720" rIns="45720" tIns="27432" bIns="27432">
-            <a:spAutoFit/>
-          </a:bodyPr>
-          <a:lstStyle/>
-          <a:p>
-            <a:pPr algn="ctr">
-              <a:spcAft>
-                <a:spcPts val="400"/>
-              </a:spcAft>
-            </a:pPr>
-            <a:r>
-              <a:rPr sz="1200" b="0" i="0">
-                <a:solidFill>
-                  <a:srgbClr val="5B6573"/>
-                </a:solidFill>
-                <a:latin typeface="Calibri"/>
-              </a:rPr>
-              <a:t>Day 45, product 0: explanation written by the LLM, source shown as a badge</a:t>
-            </a:r>
-          </a:p>
-        </p:txBody>
-      </p:sp>
-      <p:sp>
-        <p:nvSpPr>
-          <p:cNvPr id="22" name="TextBox 21"/>
-          <p:cNvSpPr txBox="1"/>
-          <p:nvPr/>
-        </p:nvSpPr>
-        <p:spPr>
-          <a:xfrm>
-            <a:off x="8092440" y="1371600"/>
-            <a:ext cx="3685032" cy="4937760"/>
-          </a:xfrm>
-          <a:prstGeom prst="rect">
-            <a:avLst/>
-          </a:prstGeom>
-          <a:noFill/>
-        </p:spPr>
-        <p:txBody>
-          <a:bodyPr wrap="square" anchor="t" lIns="45720" rIns="45720" tIns="27432" bIns="27432">
-            <a:spAutoFit/>
-          </a:bodyPr>
-          <a:lstStyle/>
-          <a:p>
-            <a:pPr algn="l">
-              <a:spcAft>
-                <a:spcPts val="400"/>
-              </a:spcAft>
-            </a:pPr>
-            <a:r>
-              <a:rPr sz="1700" b="1" i="0">
-                <a:solidFill>
-                  <a:srgbClr val="1B5E3A"/>
-                </a:solidFill>
-                <a:latin typeface="Calibri"/>
-              </a:rPr>
-              <a:t>How to use it</a:t>
-            </a:r>
-          </a:p>
-          <a:p>
-            <a:pPr algn="l">
-              <a:spcAft>
-                <a:spcPts val="400"/>
-              </a:spcAft>
-            </a:pPr>
-            <a:r>
-              <a:rPr sz="1400" b="0" i="0">
-                <a:solidFill>
-                  <a:srgbClr val="1F2937"/>
-                </a:solidFill>
-                <a:latin typeface="Calibri"/>
-              </a:rPr>
-              <a:t>•  Pick a day and a product</a:t>
-            </a:r>
-          </a:p>
-          <a:p>
-            <a:pPr algn="l">
-              <a:spcAft>
-                <a:spcPts val="400"/>
-              </a:spcAft>
-            </a:pPr>
-            <a:r>
-              <a:rPr sz="1400" b="0" i="0">
-                <a:solidFill>
-                  <a:srgbClr val="1F2937"/>
-                </a:solidFill>
-                <a:latin typeface="Calibri"/>
-              </a:rPr>
-              <a:t>•  Press Explain this decision</a:t>
-            </a:r>
-          </a:p>
-          <a:p>
-            <a:pPr algn="l">
-              <a:spcAft>
-                <a:spcPts val="400"/>
-              </a:spcAft>
-            </a:pPr>
-            <a:r>
-              <a:rPr sz="1400" b="0" i="0">
-                <a:solidFill>
-                  <a:srgbClr val="1F2937"/>
-                </a:solidFill>
-                <a:latin typeface="Calibri"/>
-              </a:rPr>
-              <a:t>•  Read 2–3 plain sentences</a:t>
-            </a:r>
-          </a:p>
-          <a:p>
-            <a:pPr algn="l">
-              <a:spcAft>
-                <a:spcPts val="400"/>
-              </a:spcAft>
-            </a:pPr>
-            <a:r>
-              <a:rPr sz="1400" b="0" i="0">
-                <a:solidFill>
-                  <a:srgbClr val="1F2937"/>
-                </a:solidFill>
-                <a:latin typeface="Calibri"/>
-              </a:rPr>
-              <a:t>•  The black badge shows who wrote it: a model name, or “deterministic template” if the check rejected the LLM</a:t>
-            </a:r>
-          </a:p>
-          <a:p>
-            <a:pPr algn="l">
-              <a:spcAft>
-                <a:spcPts val="400"/>
-              </a:spcAft>
-            </a:pPr>
-            <a:r>
-              <a:rPr sz="1400" b="0" i="0">
-                <a:solidFill>
-                  <a:srgbClr val="1F2937"/>
-                </a:solidFill>
-                <a:latin typeface="Calibri"/>
-              </a:rPr>
-              <a:t>•  Expand “the facts the model was given” to verify every number</a:t>
-            </a:r>
-          </a:p>
-        </p:txBody>
-      </p:sp>
-      <p:sp>
-        <p:nvSpPr>
-          <p:cNvPr id="23" name="TextBox 22"/>
-          <p:cNvSpPr txBox="1"/>
-          <p:nvPr/>
-        </p:nvSpPr>
-        <p:spPr>
-          <a:xfrm>
-            <a:off x="411480" y="4709160"/>
-            <a:ext cx="7406640" cy="1554480"/>
-          </a:xfrm>
-          <a:prstGeom prst="rect">
-            <a:avLst/>
-          </a:prstGeom>
-          <a:noFill/>
-        </p:spPr>
-        <p:txBody>
-          <a:bodyPr wrap="square" anchor="t" lIns="45720" rIns="45720" tIns="27432" bIns="27432">
-            <a:spAutoFit/>
-          </a:bodyPr>
-          <a:lstStyle/>
-          <a:p>
-            <a:pPr algn="l">
-              <a:spcAft>
-                <a:spcPts val="400"/>
-              </a:spcAft>
-            </a:pPr>
-            <a:r>
-              <a:rPr sz="1400" b="1" i="0">
-                <a:solidFill>
-                  <a:srgbClr val="D6336C"/>
-                </a:solidFill>
-                <a:latin typeface="Calibri"/>
-              </a:rPr>
-              <a:t>Check it yourself: </a:t>
-            </a:r>
-            <a:r>
-              <a:rPr sz="1400" b="0" i="0">
-                <a:solidFill>
-                  <a:srgbClr val="1F2937"/>
-                </a:solidFill>
-                <a:latin typeface="Calibri"/>
-              </a:rPr>
-              <a:t>2,365 units, 14.0 days of cover, demand of 169 units and a 7-day average of 78 all appear in the facts panel. If the model had invented a figure, the template would have replaced this text.</a:t>
-            </a:r>
-          </a:p>
-        </p:txBody>
-      </p:sp>
-    </p:spTree>
-  </p:cSld>
-  <p:clrMapOvr>
-    <a:masterClrMapping/>
-  </p:clrMapOvr>
-</p:sld>
-</file>
-
-<file path=ppt/slides/slide37.xml><?xml version="1.0" encoding="utf-8"?>
-<p:sld xmlns:a="http://schemas.openxmlformats.org/drawingml/2006/main" xmlns:p="http://schemas.openxmlformats.org/presentationml/2006/main" xmlns:r="http://schemas.openxmlformats.org/officeDocument/2006/relationships">
-  <p:cSld>
-    <p:spTree>
-      <p:nvGrpSpPr>
-        <p:cNvPr id="1" name=""/>
-        <p:cNvGrpSpPr/>
-        <p:nvPr/>
-      </p:nvGrpSpPr>
-      <p:grpSpPr/>
-      <p:sp>
-        <p:nvSpPr>
-          <p:cNvPr id="17" name="Rectangle 16">
-            <a:extLst>
-              <a:ext uri="{FF2B5EF4-FFF2-40B4-BE49-F238E27FC236}">
-                <a16:creationId xmlns:a16="http://schemas.microsoft.com/office/drawing/2014/main" id="{684365C9-E666-36EE-4DB1-04791BFC26FB}"/>
-              </a:ext>
-            </a:extLst>
-          </p:cNvPr>
-          <p:cNvSpPr/>
-          <p:nvPr/>
-        </p:nvSpPr>
-        <p:spPr>
-          <a:xfrm>
-            <a:off x="-1" y="0"/>
-            <a:ext cx="12191998" cy="1262131"/>
-          </a:xfrm>
-          <a:prstGeom prst="rect">
-            <a:avLst/>
-          </a:prstGeom>
-          <a:gradFill flip="none" rotWithShape="1">
-            <a:gsLst>
-              <a:gs pos="0">
-                <a:srgbClr val="1A9B46">
-                  <a:tint val="66000"/>
-                  <a:satMod val="160000"/>
-                </a:srgbClr>
-              </a:gs>
-              <a:gs pos="50000">
-                <a:srgbClr val="1A9B46">
-                  <a:tint val="44500"/>
-                  <a:satMod val="160000"/>
-                </a:srgbClr>
-              </a:gs>
-              <a:gs pos="100000">
-                <a:srgbClr val="1A9B46">
-                  <a:tint val="23500"/>
-                  <a:satMod val="160000"/>
-                </a:srgbClr>
-              </a:gs>
-            </a:gsLst>
-            <a:path path="circle">
-              <a:fillToRect l="50000" t="50000" r="50000" b="50000"/>
-            </a:path>
-            <a:tileRect/>
-          </a:gradFill>
-          <a:ln>
-            <a:noFill/>
-          </a:ln>
-        </p:spPr>
-        <p:style>
-          <a:lnRef idx="2">
-            <a:schemeClr val="accent1">
-              <a:shade val="50000"/>
-            </a:schemeClr>
-          </a:lnRef>
-          <a:fillRef idx="1">
-            <a:schemeClr val="accent1"/>
-          </a:fillRef>
-          <a:effectRef idx="0">
-            <a:schemeClr val="accent1"/>
-          </a:effectRef>
-          <a:fontRef idx="minor">
-            <a:schemeClr val="lt1"/>
-          </a:fontRef>
-        </p:style>
-        <p:txBody>
-          <a:bodyPr rtlCol="0" anchor="ctr"/>
-          <a:lstStyle/>
-          <a:p>
-            <a:pPr algn="ctr"/>
-            <a:endParaRPr lang="en-IN" sz="4400" dirty="0">
-              <a:solidFill>
-                <a:schemeClr val="accent1">
-                  <a:lumMod val="50000"/>
-                </a:schemeClr>
-              </a:solidFill>
-            </a:endParaRPr>
-          </a:p>
-        </p:txBody>
-      </p:sp>
-      <p:sp>
-        <p:nvSpPr>
-          <p:cNvPr id="10" name="Google Shape;91;p1">
-            <a:extLst>
-              <a:ext uri="{FF2B5EF4-FFF2-40B4-BE49-F238E27FC236}">
-                <a16:creationId xmlns:a16="http://schemas.microsoft.com/office/drawing/2014/main" id="{4D89FC00-7640-2DC1-0BAF-6A1DC613CF6B}"/>
-              </a:ext>
-            </a:extLst>
-          </p:cNvPr>
-          <p:cNvSpPr txBox="1"/>
-          <p:nvPr/>
-        </p:nvSpPr>
-        <p:spPr>
-          <a:xfrm>
-            <a:off x="-1" y="6416040"/>
-            <a:ext cx="12191998" cy="441960"/>
-          </a:xfrm>
-          <a:prstGeom prst="rect">
-            <a:avLst/>
-          </a:prstGeom>
-          <a:gradFill flip="none" rotWithShape="1">
-            <a:gsLst>
-              <a:gs pos="0">
-                <a:srgbClr val="1A9B46">
-                  <a:tint val="66000"/>
-                  <a:satMod val="160000"/>
-                </a:srgbClr>
-              </a:gs>
-              <a:gs pos="50000">
-                <a:srgbClr val="1A9B46">
-                  <a:tint val="44500"/>
-                  <a:satMod val="160000"/>
-                </a:srgbClr>
-              </a:gs>
-              <a:gs pos="100000">
-                <a:srgbClr val="1A9B46">
-                  <a:tint val="23500"/>
-                  <a:satMod val="160000"/>
-                </a:srgbClr>
-              </a:gs>
-            </a:gsLst>
-            <a:path path="circle">
-              <a:fillToRect l="50000" t="50000" r="50000" b="50000"/>
-            </a:path>
-            <a:tileRect/>
-          </a:gradFill>
-          <a:ln>
-            <a:noFill/>
-          </a:ln>
-        </p:spPr>
-        <p:txBody>
-          <a:bodyPr spcFirstLastPara="1" wrap="square" lIns="91425" tIns="45700" rIns="91425" bIns="45700" anchor="t" anchorCtr="0">
-            <a:noAutofit/>
-          </a:bodyPr>
-          <a:lstStyle/>
-          <a:p>
-            <a:pPr marL="0" marR="0" lvl="0" indent="0" algn="ctr" rtl="0">
-              <a:lnSpc>
-                <a:spcPct val="90000"/>
-              </a:lnSpc>
-              <a:spcBef>
-                <a:spcPts val="0"/>
-              </a:spcBef>
-              <a:spcAft>
-                <a:spcPts val="0"/>
-              </a:spcAft>
-              <a:buNone/>
-            </a:pPr>
-            <a:r>
-              <a:rPr lang="en-IN" sz="1600" b="1" i="0" u="none" strike="noStrike" cap="none" dirty="0">
-                <a:solidFill>
-                  <a:srgbClr val="081271"/>
-                </a:solidFill>
-                <a:latin typeface="Times New Roman"/>
-                <a:ea typeface="Times New Roman"/>
-                <a:cs typeface="Times New Roman"/>
-                <a:sym typeface="Times New Roman"/>
-              </a:rPr>
-              <a:t>[Final Project Review]</a:t>
-            </a:r>
-            <a:r>
-              <a:rPr lang="en-IN" sz="1600" b="1" dirty="0">
-                <a:solidFill>
-                  <a:srgbClr val="081271"/>
-                </a:solidFill>
-                <a:latin typeface="Times New Roman"/>
-                <a:ea typeface="Times New Roman"/>
-                <a:cs typeface="Times New Roman"/>
-                <a:sym typeface="Times New Roman"/>
-              </a:rPr>
-              <a:t/>
-            </a:r>
-            <a:r>
-              <a:rPr lang="en-IN" sz="1600" b="1" i="0" u="none" strike="noStrike" cap="none" dirty="0">
-                <a:solidFill>
-                  <a:srgbClr val="081271"/>
-                </a:solidFill>
-                <a:latin typeface="Times New Roman"/>
-                <a:ea typeface="Times New Roman"/>
-                <a:cs typeface="Times New Roman"/>
-                <a:sym typeface="Times New Roman"/>
-              </a:rPr>
-              <a:t/>
-            </a:r>
-            <a:endParaRPr sz="1600" b="1" i="0" u="none" strike="noStrike" cap="none" dirty="0">
-              <a:solidFill>
-                <a:srgbClr val="081271"/>
-              </a:solidFill>
-              <a:latin typeface="Times New Roman"/>
-              <a:ea typeface="Times New Roman"/>
-              <a:cs typeface="Times New Roman"/>
-              <a:sym typeface="Times New Roman"/>
-            </a:endParaRPr>
-          </a:p>
-        </p:txBody>
-      </p:sp>
-      <p:cxnSp>
-        <p:nvCxnSpPr>
-          <p:cNvPr id="16" name="Straight Connector 15">
-            <a:extLst>
-              <a:ext uri="{FF2B5EF4-FFF2-40B4-BE49-F238E27FC236}">
-                <a16:creationId xmlns:a16="http://schemas.microsoft.com/office/drawing/2014/main" id="{170CA935-25F2-6478-C664-35BFDF7E813C}"/>
-              </a:ext>
-            </a:extLst>
-          </p:cNvPr>
-          <p:cNvCxnSpPr/>
-          <p:nvPr/>
-        </p:nvCxnSpPr>
-        <p:spPr>
-          <a:xfrm>
-            <a:off x="0" y="1260899"/>
-            <a:ext cx="12192000" cy="0"/>
-          </a:xfrm>
-          <a:prstGeom prst="line">
-            <a:avLst/>
-          </a:prstGeom>
-          <a:ln w="28575">
-            <a:solidFill>
-              <a:srgbClr val="1A9B46"/>
-            </a:solidFill>
-          </a:ln>
-        </p:spPr>
-        <p:style>
-          <a:lnRef idx="1">
-            <a:schemeClr val="accent1"/>
-          </a:lnRef>
-          <a:fillRef idx="0">
-            <a:schemeClr val="accent1"/>
-          </a:fillRef>
-          <a:effectRef idx="0">
-            <a:schemeClr val="accent1"/>
-          </a:effectRef>
-          <a:fontRef idx="minor">
-            <a:schemeClr val="tx1"/>
-          </a:fontRef>
-        </p:style>
-      </p:cxnSp>
-      <p:sp>
-        <p:nvSpPr>
-          <p:cNvPr id="2" name="Title 1"/>
-          <p:cNvSpPr>
-            <a:spLocks noGrp="1"/>
-          </p:cNvSpPr>
-          <p:nvPr>
-            <p:ph type="title"/>
-          </p:nvPr>
-        </p:nvSpPr>
-        <p:spPr/>
-        <p:txBody>
-          <a:bodyPr/>
-          <a:lstStyle/>
-          <a:p>
-            <a:r>
-              <a:rPr sz="3200"/>
-              <a:t>Dashboard (7/7): Policy Comparison and Robustness</a:t>
+              <a:t>Dashboard (5/5): Policy Comparison and Robustness</a:t>
             </a:r>
           </a:p>
         </p:txBody>
@@ -22993,7 +19976,7 @@
 </p:sld>
 </file>
 
-<file path=ppt/slides/slide38.xml><?xml version="1.0" encoding="utf-8"?>
+<file path=ppt/slides/slide34.xml><?xml version="1.0" encoding="utf-8"?>
 <p:sld xmlns:a="http://schemas.openxmlformats.org/drawingml/2006/main" xmlns:p="http://schemas.openxmlformats.org/presentationml/2006/main" xmlns:r="http://schemas.openxmlformats.org/officeDocument/2006/relationships">
   <p:cSld>
     <p:spTree>
@@ -24660,7 +21643,7 @@
 </p:sld>
 </file>
 
-<file path=ppt/slides/slide39.xml><?xml version="1.0" encoding="utf-8"?>
+<file path=ppt/slides/slide35.xml><?xml version="1.0" encoding="utf-8"?>
 <p:sld xmlns:a="http://schemas.openxmlformats.org/drawingml/2006/main" xmlns:p="http://schemas.openxmlformats.org/presentationml/2006/main" xmlns:r="http://schemas.openxmlformats.org/officeDocument/2006/relationships">
   <p:cSld>
     <p:spTree>
@@ -25525,7 +22508,7 @@
 </p:sld>
 </file>
 
-<file path=ppt/slides/slide40.xml><?xml version="1.0" encoding="utf-8"?>
+<file path=ppt/slides/slide36.xml><?xml version="1.0" encoding="utf-8"?>
 <p:sld xmlns:a="http://schemas.openxmlformats.org/drawingml/2006/main" xmlns:p="http://schemas.openxmlformats.org/presentationml/2006/main" xmlns:r="http://schemas.openxmlformats.org/officeDocument/2006/relationships">
   <p:cSld>
     <p:spTree>
@@ -26548,7 +23531,7 @@
 </p:sld>
 </file>
 
-<file path=ppt/slides/slide41.xml><?xml version="1.0" encoding="utf-8"?>
+<file path=ppt/slides/slide37.xml><?xml version="1.0" encoding="utf-8"?>
 <p:sld xmlns:a="http://schemas.openxmlformats.org/drawingml/2006/main" xmlns:p="http://schemas.openxmlformats.org/presentationml/2006/main" xmlns:r="http://schemas.openxmlformats.org/officeDocument/2006/relationships">
   <p:cSld>
     <p:spTree>
@@ -27507,7 +24490,7 @@
 </p:sld>
 </file>
 
-<file path=ppt/slides/slide42.xml><?xml version="1.0" encoding="utf-8"?>
+<file path=ppt/slides/slide38.xml><?xml version="1.0" encoding="utf-8"?>
 <p:sld xmlns:a="http://schemas.openxmlformats.org/drawingml/2006/main" xmlns:p="http://schemas.openxmlformats.org/presentationml/2006/main" xmlns:r="http://schemas.openxmlformats.org/officeDocument/2006/relationships">
   <p:cSld>
     <p:spTree>
@@ -28081,7 +25064,7 @@
 </p:sld>
 </file>
 
-<file path=ppt/slides/slide43.xml><?xml version="1.0" encoding="utf-8"?>
+<file path=ppt/slides/slide39.xml><?xml version="1.0" encoding="utf-8"?>
 <p:sld xmlns:a="http://schemas.openxmlformats.org/drawingml/2006/main" xmlns:p="http://schemas.openxmlformats.org/presentationml/2006/main" xmlns:r="http://schemas.openxmlformats.org/officeDocument/2006/relationships">
   <p:cSld>
     <p:spTree>
@@ -28561,7 +25544,7 @@
                 </a:solidFill>
                 <a:latin typeface="Calibri"/>
               </a:rPr>
-              <a:t>38+</a:t>
+              <a:t>39+</a:t>
             </a:r>
           </a:p>
           <a:p>
@@ -28662,7 +25645,7 @@
                 </a:solidFill>
                 <a:latin typeface="Calibri"/>
               </a:rPr>
-              <a:t>10,200</a:t>
+              <a:t>12,500</a:t>
             </a:r>
           </a:p>
           <a:p>
@@ -29138,7 +26121,7 @@
 </p:sld>
 </file>
 
-<file path=ppt/slides/slide44.xml><?xml version="1.0" encoding="utf-8"?>
+<file path=ppt/slides/slide40.xml><?xml version="1.0" encoding="utf-8"?>
 <p:sld xmlns:a="http://schemas.openxmlformats.org/drawingml/2006/main" xmlns:p="http://schemas.openxmlformats.org/presentationml/2006/main" xmlns:r="http://schemas.openxmlformats.org/officeDocument/2006/relationships">
   <p:cSld>
     <p:spTree>
@@ -30051,7 +27034,7 @@
 </p:sld>
 </file>
 
-<file path=ppt/slides/slide45.xml><?xml version="1.0" encoding="utf-8"?>
+<file path=ppt/slides/slide41.xml><?xml version="1.0" encoding="utf-8"?>
 <p:sld xmlns:a="http://schemas.openxmlformats.org/drawingml/2006/main" xmlns:p="http://schemas.openxmlformats.org/presentationml/2006/main" xmlns:r="http://schemas.openxmlformats.org/officeDocument/2006/relationships">
   <p:cSld>
     <p:spTree>
@@ -30688,7 +27671,7 @@
 </p:sld>
 </file>
 
-<file path=ppt/slides/slide46.xml><?xml version="1.0" encoding="utf-8"?>
+<file path=ppt/slides/slide42.xml><?xml version="1.0" encoding="utf-8"?>
 <p:sld xmlns:a="http://schemas.openxmlformats.org/drawingml/2006/main" xmlns:p="http://schemas.openxmlformats.org/presentationml/2006/main" xmlns:r="http://schemas.openxmlformats.org/officeDocument/2006/relationships">
   <p:cSld>
     <p:spTree>
@@ -31146,7 +28129,7 @@
 </p:sld>
 </file>
 
-<file path=ppt/slides/slide47.xml><?xml version="1.0" encoding="utf-8"?>
+<file path=ppt/slides/slide43.xml><?xml version="1.0" encoding="utf-8"?>
 <p:sld xmlns:a="http://schemas.openxmlformats.org/drawingml/2006/main" xmlns:p="http://schemas.openxmlformats.org/presentationml/2006/main" xmlns:r="http://schemas.openxmlformats.org/officeDocument/2006/relationships">
   <p:cSld>
     <p:spTree>

--- a/reports/SupplyAI-RL_Final_Project_Review.pptx
+++ b/reports/SupplyAI-RL_Final_Project_Review.pptx
@@ -6293,7 +6293,7 @@
                 </a:solidFill>
                 <a:latin typeface="Calibri" panose="020F0502020204030204"/>
               </a:rPr>
-              <a:t>Three demand types: steady, moderate, bursty</a:t>
+              <a:t>Three kinds of demand: steady, moderate, bursty</a:t>
             </a:r>
             <a:endParaRPr sz="1200" b="0" i="0">
               <a:solidFill>
@@ -6360,7 +6360,7 @@
                 </a:solidFill>
                 <a:latin typeface="Calibri" panose="020F0502020204030204"/>
               </a:rPr>
-              <a:t>•  1,067,371 sales records, UK online gift shop</a:t>
+              <a:t>•  1,067,371 sales records from a UK online gift shop</a:t>
             </a:r>
             <a:endParaRPr sz="1500" b="0" i="0">
               <a:solidFill>
@@ -6382,7 +6382,7 @@
                 </a:solidFill>
                 <a:latin typeface="Calibri" panose="020F0502020204030204"/>
               </a:rPr>
-              <a:t>•  Cleaned: cancellations, returns, negative quantities and missing codes removed; one row per product per day; Saturdays dropped (the shop never traded)</a:t>
+              <a:t>•  Cleaned: cancellations, returns and bad rows removed; one row per product per day; Saturdays dropped (the shop never opened)</a:t>
             </a:r>
             <a:endParaRPr sz="1500" b="0" i="0">
               <a:solidFill>
@@ -6404,7 +6404,7 @@
                 </a:solidFill>
                 <a:latin typeface="Calibri" panose="020F0502020204030204"/>
               </a:rPr>
-              <a:t>•  10 products chosen on purpose: 4 steady (CV 1.02–1.20), 3 moderate (1.29–1.65), 3 bursty (2.09–2.34)</a:t>
+              <a:t>•  10 products picked on purpose: 4 steady, 3 moderate, 3 bursty (very spiky sales)</a:t>
             </a:r>
             <a:endParaRPr sz="1500" b="0" i="0">
               <a:solidFill>
@@ -6426,7 +6426,7 @@
                 </a:solidFill>
                 <a:latin typeface="Calibri" panose="020F0502020204030204"/>
               </a:rPr>
-              <a:t>•  The agent never sees the records: five measurements (mean, variability, weekday, month, zero-sales days) drive a Gamma–Poisson demand model</a:t>
+              <a:t>•  The agent never sees the raw sales. We measure five things (average, ups and downs, weekday pattern, month pattern, zero-sale days) and the simulator recreates them</a:t>
             </a:r>
             <a:endParaRPr sz="1500" b="0" i="0">
               <a:solidFill>
@@ -6471,7 +6471,7 @@
                 </a:solidFill>
                 <a:latin typeface="Calibri" panose="020F0502020204030204"/>
               </a:rPr>
-              <a:t>If all ten products behaved alike, one simple rule would handle them all and there would be nothing for an AI to learn.</a:t>
+              <a:t>If all ten products behaved the same, one simple rule would work for all and an AI would have nothing to learn.</a:t>
             </a:r>
             <a:endParaRPr sz="1400" b="0" i="0">
               <a:solidFill>
@@ -6713,7 +6713,7 @@
           <a:p>
             <a:r>
               <a:rPr sz="3200"/>
-              <a:t>Classical Baselines and a Fair Evaluation</a:t>
+              <a:t>Classical Methods and a Fair Test</a:t>
             </a:r>
             <a:endParaRPr sz="3200"/>
           </a:p>
@@ -6864,7 +6864,7 @@
                           </a:solidFill>
                           <a:latin typeface="Calibri" panose="020F0502020204030204"/>
                         </a:rPr>
-                        <a:t>reorder below 11 days of cover, order up to 16</a:t>
+                        <a:t>order when stock covers under 11 days; refill up to 16 days</a:t>
                       </a:r>
                       <a:endParaRPr sz="1300" b="0" i="0">
                         <a:solidFill>
@@ -6922,7 +6922,7 @@
                           </a:solidFill>
                           <a:latin typeface="Calibri" panose="020F0502020204030204"/>
                         </a:rPr>
-                        <a:t>reorder at 8 days of cover, safety factor 1.6</a:t>
+                        <a:t>order at 8 days of stock left, with a safety margin of 1.6</a:t>
                       </a:r>
                       <a:endParaRPr sz="1300" b="0" i="0">
                         <a:solidFill>
@@ -6980,7 +6980,7 @@
                           </a:solidFill>
                           <a:latin typeface="Calibri" panose="020F0502020204030204"/>
                         </a:rPr>
-                        <a:t>3-day horizon, cheapest supplier</a:t>
+                        <a:t>plan 3 days ahead, use the cheapest supplier</a:t>
                       </a:r>
                       <a:endParaRPr sz="1300" b="0" i="0">
                         <a:solidFill>
@@ -7038,7 +7038,7 @@
                           </a:solidFill>
                           <a:latin typeface="Calibri" panose="020F0502020204030204"/>
                         </a:rPr>
-                        <a:t>1-day window, z = 1.28, review every 4 days</a:t>
+                        <a:t>forecast from yesterday, extra safety stock (about 90% service), check every 4 days</a:t>
                       </a:r>
                       <a:endParaRPr sz="1300" b="0" i="0">
                         <a:solidFill>
@@ -7095,7 +7095,7 @@
                           </a:solidFill>
                           <a:latin typeface="Calibri" panose="020F0502020204030204"/>
                         </a:rPr>
-                        <a:t>Seeds</a:t>
+                        <a:t>Seeds (test runs)</a:t>
                       </a:r>
                       <a:endParaRPr sz="1300" b="1" i="0">
                         <a:solidFill>
@@ -7240,7 +7240,7 @@
                           </a:solidFill>
                           <a:latin typeface="Calibri" panose="020F0502020204030204"/>
                         </a:rPr>
-                        <a:t>picking the best RL checkpoint</a:t>
+                        <a:t>choosing the best RL version</a:t>
                       </a:r>
                       <a:endParaRPr sz="1300" b="0" i="0">
                         <a:solidFill>
@@ -7298,7 +7298,7 @@
                           </a:solidFill>
                           <a:latin typeface="Calibri" panose="020F0502020204030204"/>
                         </a:rPr>
-                        <a:t>reporting only; never used to choose anything</a:t>
+                        <a:t>final results only; never used to make any choice</a:t>
                       </a:r>
                       <a:endParaRPr sz="1300" b="0" i="0">
                         <a:solidFill>
@@ -7362,7 +7362,7 @@
                 </a:solidFill>
                 <a:latin typeface="Calibri" panose="020F0502020204030204"/>
               </a:rPr>
-              <a:t>Widening the search lifted the best classical method from ₹69.7 lakh to ₹89.2 lakh on the tuning seeds. Untuned baselines would have made the AI look better than it is.</a:t>
+              <a:t>Better settings lifted the best classical method from ₹69.7 lakh to ₹89.2 lakh. Without tuning, the AI would have looked better than it really is.</a:t>
             </a:r>
             <a:endParaRPr sz="1600" b="0" i="0">
               <a:solidFill>
@@ -7384,7 +7384,7 @@
                 </a:solidFill>
                 <a:latin typeface="Calibri" panose="020F0502020204030204"/>
               </a:rPr>
-              <a:t>•  Same options for everyone. </a:t>
+              <a:t>•  Same choices for all. </a:t>
             </a:r>
             <a:r>
               <a:rPr sz="1600" b="0" i="0">
@@ -7393,7 +7393,7 @@
                 </a:solidFill>
                 <a:latin typeface="Calibri" panose="020F0502020204030204"/>
               </a:rPr>
-              <a:t>Every classical method picks from the same 21 options per product as the AI, so none has finer control.</a:t>
+              <a:t>Every classical method picks from the same 21 options per product as the AI.</a:t>
             </a:r>
             <a:endParaRPr sz="1600" b="0" i="0">
               <a:solidFill>
@@ -7415,7 +7415,7 @@
                 </a:solidFill>
                 <a:latin typeface="Calibri" panose="020F0502020204030204"/>
               </a:rPr>
-              <a:t>•  Paired comparison. </a:t>
+              <a:t>•  Same customers for all. </a:t>
             </a:r>
             <a:r>
               <a:rPr sz="1600" b="0" i="0">
@@ -7424,7 +7424,7 @@
                 </a:solidFill>
                 <a:latin typeface="Calibri" panose="020F0502020204030204"/>
               </a:rPr>
-              <a:t>Every method faces the same customers and delivery delays on each seed, so we test the per-seed difference, which removes run-to-run randomness.</a:t>
+              <a:t>Every method faces the same customers and delays on each test run, so we compare them run by run.</a:t>
             </a:r>
             <a:endParaRPr sz="1600" b="0" i="0">
               <a:solidFill>
@@ -7761,7 +7761,7 @@
                 </a:solidFill>
                 <a:latin typeface="Calibri" panose="020F0502020204030204"/>
               </a:rPr>
-              <a:t>the LLM is never asked why. The agent’s real reason is a neural network, and any “because” the LLM wrote would be a plausible story, not the cause.</a:t>
+              <a:t>the LLM is never asked why. The agent’s real reason is hidden inside a neural network, so any “because” from the LLM would just be a believable story.</a:t>
             </a:r>
             <a:endParaRPr sz="1500" b="0" i="0">
               <a:solidFill>
@@ -8003,7 +8003,7 @@
           <a:p>
             <a:r>
               <a:rPr sz="3200"/>
-              <a:t>LLM Crisis Generator and Curriculum Training</a:t>
+              <a:t>LLM Crisis Generator and Training on Crises</a:t>
             </a:r>
             <a:endParaRPr sz="3200"/>
           </a:p>
@@ -8184,7 +8184,7 @@
                           </a:solidFill>
                           <a:latin typeface="Calibri" panose="020F0502020204030204"/>
                         </a:rPr>
-                        <a:t>demand 3× on four products</a:t>
+                        <a:t>demand triples on four products</a:t>
                       </a:r>
                       <a:endParaRPr sz="1300" b="0" i="0">
                         <a:solidFill>
@@ -8270,7 +8270,7 @@
                           </a:solidFill>
                           <a:latin typeface="Calibri" panose="020F0502020204030204"/>
                         </a:rPr>
-                        <a:t>supplier 2 offline</a:t>
+                        <a:t>supplier 2 goes offline</a:t>
                       </a:r>
                       <a:endParaRPr sz="1300" b="0" i="0">
                         <a:solidFill>
@@ -8442,7 +8442,7 @@
                           </a:solidFill>
                           <a:latin typeface="Calibri" panose="020F0502020204030204"/>
                         </a:rPr>
-                        <a:t>costs 1.6×</a:t>
+                        <a:t>costs rise 1.6×</a:t>
                       </a:r>
                       <a:endParaRPr sz="1300" b="0" i="0">
                         <a:solidFill>
@@ -8525,7 +8525,7 @@
                 </a:solidFill>
                 <a:latin typeface="Calibri" panose="020F0502020204030204"/>
               </a:rPr>
-              <a:t>These overlap: the supplier goes down during the demand spike. A single-event test never reaches that combination.</a:t>
+              <a:t>These events overlap: a supplier fails during the demand spike. A one-event test never checks that combination.</a:t>
             </a:r>
             <a:endParaRPr sz="1400" b="0" i="0">
               <a:solidFill>
@@ -8616,7 +8616,7 @@
                 </a:solidFill>
                 <a:latin typeface="Calibri" panose="020F0502020204030204"/>
               </a:rPr>
-              <a:t>Nothing the LLM writes is trusted</a:t>
+              <a:t>We do not trust what the LLM writes</a:t>
             </a:r>
             <a:endParaRPr sz="1700" b="1" i="0">
               <a:solidFill>
@@ -8638,7 +8638,7 @@
                 </a:solidFill>
                 <a:latin typeface="Calibri" panose="020F0502020204030204"/>
               </a:rPr>
-              <a:t>•  Scenario type must be known</a:t>
+              <a:t>•  The event type must be one we know</a:t>
             </a:r>
             <a:endParaRPr sz="1400" b="0" i="0">
               <a:solidFill>
@@ -8660,7 +8660,7 @@
                 </a:solidFill>
                 <a:latin typeface="Calibri" panose="020F0502020204030204"/>
               </a:rPr>
-              <a:t>•  Supplier and product numbers must exist; out-of-range products are dropped, not wrapped</a:t>
+              <a:t>•  Suppliers and products must exist (wrong ones are dropped)</a:t>
             </a:r>
             <a:endParaRPr sz="1400" b="0" i="0">
               <a:solidFill>
@@ -8682,7 +8682,7 @@
                 </a:solidFill>
                 <a:latin typeface="Calibri" panose="020F0502020204030204"/>
               </a:rPr>
-              <a:t>•  Values clamped to safe ranges</a:t>
+              <a:t>•  Numbers are kept within safe ranges</a:t>
             </a:r>
             <a:endParaRPr sz="1400" b="0" i="0">
               <a:solidFill>
@@ -8704,7 +8704,7 @@
                 </a:solidFill>
                 <a:latin typeface="Calibri" panose="020F0502020204030204"/>
               </a:rPr>
-              <a:t>•  Windows moved inside the 180-day run</a:t>
+              <a:t>•  Events are moved to fit inside the 180 days</a:t>
             </a:r>
             <a:endParaRPr sz="1400" b="0" i="0">
               <a:solidFill>
@@ -8726,7 +8726,7 @@
                 </a:solidFill>
                 <a:latin typeface="Calibri" panose="020F0502020204030204"/>
               </a:rPr>
-              <a:t>•  6 deliberately broken inputs: 3 survived, none as written</a:t>
+              <a:t>•  6 deliberately bad inputs: none got through as written</a:t>
             </a:r>
             <a:endParaRPr sz="1400" b="0" i="0">
               <a:solidFill>
@@ -8817,7 +8817,7 @@
                 </a:solidFill>
                 <a:latin typeface="Calibri" panose="020F0502020204030204"/>
               </a:rPr>
-              <a:t>Curriculum training</a:t>
+              <a:t>Training on crises</a:t>
             </a:r>
             <a:endParaRPr sz="1700" b="1" i="0">
               <a:solidFill>
@@ -8839,7 +8839,7 @@
                 </a:solidFill>
                 <a:latin typeface="Calibri" panose="020F0502020204030204"/>
               </a:rPr>
-              <a:t>•  16 crisis sets from 19 LLM scenarios, saved, then split 10 train / 6 test</a:t>
+              <a:t>•  16 sets of crises (from 19 LLM scenarios): 10 for training, 6 for testing</a:t>
             </a:r>
             <a:endParaRPr sz="1400" b="0" i="0">
               <a:solidFill>
@@ -8861,7 +8861,7 @@
                 </a:solidFill>
                 <a:latin typeface="Calibri" panose="020F0502020204030204"/>
               </a:rPr>
-              <a:t>•  The agent trains on a random set from the 10 and is tested on the 6 it never saw; seed, settings and steps match the untuned agent, so crisis exposure is the only difference</a:t>
+              <a:t>•  The agent trains on the 10 and is tested on the 6 it never saw. Everything else matches the plain agent, so crises are the only difference</a:t>
             </a:r>
             <a:endParaRPr sz="1400" b="0" i="0">
               <a:solidFill>
@@ -8883,7 +8883,7 @@
                 </a:solidFill>
                 <a:latin typeface="Calibri" panose="020F0502020204030204"/>
               </a:rPr>
-              <a:t>•  The split is the whole method: testing on training crises would only measure memorisation</a:t>
+              <a:t>•  The split matters: testing on crises it trained on would only prove it memorised them</a:t>
             </a:r>
             <a:endParaRPr sz="1400" b="0" i="0">
               <a:solidFill>
@@ -9216,7 +9216,7 @@
                 </a:solidFill>
                 <a:latin typeface="Calibri" panose="020F0502020204030204"/>
               </a:rPr>
-              <a:t>Streamlit dashboard, forecast + safety stock, held-out seed 500</a:t>
+              <a:t>Dashboard: forecast + safety stock policy, test run 500</a:t>
             </a:r>
             <a:endParaRPr sz="1200" b="0" i="0">
               <a:solidFill>
@@ -9320,7 +9320,7 @@
                 </a:solidFill>
                 <a:latin typeface="Calibri" panose="020F0502020204030204"/>
               </a:rPr>
-              <a:t>Pick the policy and seed</a:t>
+              <a:t>Choose the policy and test run</a:t>
             </a:r>
             <a:endParaRPr sz="1600" b="1" i="0">
               <a:solidFill>
@@ -9342,7 +9342,7 @@
                 </a:solidFill>
                 <a:latin typeface="Calibri" panose="020F0502020204030204"/>
               </a:rPr>
-              <a:t>Sidebar: any policy, any held-out seed, optional crisis.</a:t>
+              <a:t>Sidebar: any policy, any test run, with or without a crisis.</a:t>
             </a:r>
             <a:endParaRPr sz="1400" b="0" i="0">
               <a:solidFill>
@@ -9468,7 +9468,7 @@
                 </a:solidFill>
                 <a:latin typeface="Calibri" panose="020F0502020204030204"/>
               </a:rPr>
-              <a:t>Profit ₹87.8 lakh, fill rate, ordering fees, stockout cost, overflow.</a:t>
+              <a:t>Profit ₹87.8 lakh, share of demand served, order fees, lost sales, wasted goods.</a:t>
             </a:r>
             <a:endParaRPr sz="1400" b="0" i="0">
               <a:solidFill>
@@ -9594,7 +9594,7 @@
                 </a:solidFill>
                 <a:latin typeface="Calibri" panose="020F0502020204030204"/>
               </a:rPr>
-              <a:t>Two single-axis charts: never a dual axis.</a:t>
+              <a:t>Two simple charts, each with its own scale.</a:t>
             </a:r>
             <a:endParaRPr sz="1400" b="0" i="0">
               <a:solidFill>
@@ -10053,7 +10053,7 @@
                 </a:solidFill>
                 <a:latin typeface="Calibri" panose="020F0502020204030204"/>
               </a:rPr>
-              <a:t>RL challenger: orders spread over all three suppliers</a:t>
+              <a:t>RL challenger: orders spread across all three suppliers</a:t>
             </a:r>
             <a:endParaRPr sz="1200" b="0" i="0">
               <a:solidFill>
@@ -10127,7 +10127,7 @@
                 </a:solidFill>
                 <a:latin typeface="Calibri" panose="020F0502020204030204"/>
               </a:rPr>
-              <a:t>Engine with a crisis injected: shaded band = disruption</a:t>
+              <a:t>Engine with a crisis added: shaded band = disruption</a:t>
             </a:r>
             <a:endParaRPr sz="1200" b="0" i="0">
               <a:solidFill>
@@ -10181,7 +10181,7 @@
                 </a:solidFill>
                 <a:latin typeface="Calibri" panose="020F0502020204030204"/>
               </a:rPr>
-              <a:t>602 orders across all three suppliers against the engine’s 323. That fragmentation is the cause of the agent’s double ordering fees.   </a:t>
+              <a:t>602 orders spread over all three suppliers, against 323 for the engine. This splitting is why the agent pays about double the order fees.   </a:t>
             </a:r>
             <a:r>
               <a:rPr sz="1400" b="1" i="0">
@@ -10199,7 +10199,7 @@
                 </a:solidFill>
                 <a:latin typeface="Calibri" panose="020F0502020204030204"/>
               </a:rPr>
-              <a:t>the red band marks the days the disruption is active, so stock and profit can be read against it.</a:t>
+              <a:t>the shaded band shows the days of the disruption, so you can read stock and profit against it.</a:t>
             </a:r>
             <a:endParaRPr sz="1400" b="0" i="0">
               <a:solidFill>
@@ -10532,7 +10532,7 @@
                 </a:solidFill>
                 <a:latin typeface="Calibri" panose="020F0502020204030204"/>
               </a:rPr>
-              <a:t>“Before”: a fixed daily order.  “After”: the engine, with the RL challenger beside it.</a:t>
+              <a:t>“Before”: the same fixed order every day.  “After”: our engine, with the RL challenger beside it.</a:t>
             </a:r>
             <a:endParaRPr sz="1200" b="0" i="0">
               <a:solidFill>
@@ -10758,7 +10758,7 @@
                 </a:solidFill>
                 <a:latin typeface="Calibri" panose="020F0502020204030204"/>
               </a:rPr>
-              <a:t>Fill rate   +5.6 points</a:t>
+              <a:t>Share of demand served   +5.6 points</a:t>
             </a:r>
             <a:endParaRPr sz="1300" b="0" i="0">
               <a:solidFill>
@@ -10871,7 +10871,7 @@
                 </a:solidFill>
                 <a:latin typeface="Calibri" panose="020F0502020204030204"/>
               </a:rPr>
-              <a:t>Stockout cost   -79%</a:t>
+              <a:t>Lost-sales cost   -79%</a:t>
             </a:r>
             <a:endParaRPr sz="1300" b="0" i="0">
               <a:solidFill>
@@ -10916,7 +10916,7 @@
                 </a:solidFill>
                 <a:latin typeface="Calibri" panose="020F0502020204030204"/>
               </a:rPr>
-              <a:t>Most of the gain comes from forecasting with safety stock, which is what the engine does, not from RL.</a:t>
+              <a:t>Most of this gain comes from smart forecasting with safety stock (the engine), not from RL.</a:t>
             </a:r>
             <a:endParaRPr sz="1300" b="0" i="1">
               <a:solidFill>
@@ -11249,7 +11249,7 @@
                 </a:solidFill>
                 <a:latin typeface="Calibri" panose="020F0502020204030204"/>
               </a:rPr>
-              <a:t>Day 45, product 0: explanation written by the LLM, source shown as a badge</a:t>
+              <a:t>Day 45, product 0: explanation written by the LLM; the badge shows who wrote it</a:t>
             </a:r>
             <a:endParaRPr sz="1200" b="0" i="0">
               <a:solidFill>
@@ -11316,7 +11316,7 @@
                 </a:solidFill>
                 <a:latin typeface="Calibri" panose="020F0502020204030204"/>
               </a:rPr>
-              <a:t>•  Pick a day and a product</a:t>
+              <a:t>•  Choose a day and a product</a:t>
             </a:r>
             <a:endParaRPr sz="1400" b="0" i="0">
               <a:solidFill>
@@ -11382,7 +11382,7 @@
                 </a:solidFill>
                 <a:latin typeface="Calibri" panose="020F0502020204030204"/>
               </a:rPr>
-              <a:t>•  The black badge shows who wrote it: a model name, or “deterministic template” if the check rejected the LLM</a:t>
+              <a:t>•  The black badge shows the writer: a model name, or “template” if our check rejected the LLM</a:t>
             </a:r>
             <a:endParaRPr sz="1400" b="0" i="0">
               <a:solidFill>
@@ -11404,7 +11404,7 @@
                 </a:solidFill>
                 <a:latin typeface="Calibri" panose="020F0502020204030204"/>
               </a:rPr>
-              <a:t>•  Expand “the facts the model was given” to verify every number</a:t>
+              <a:t>•  Open “the facts the model was given” to check every number</a:t>
             </a:r>
             <a:endParaRPr sz="1400" b="0" i="0">
               <a:solidFill>
@@ -11458,7 +11458,7 @@
                 </a:solidFill>
                 <a:latin typeface="Calibri" panose="020F0502020204030204"/>
               </a:rPr>
-              <a:t>2,365 units, 14.0 days of cover, demand of 169 units and a 7-day average of 78 all appear in the facts panel. If the model had invented a figure, the template would have replaced this text.</a:t>
+              <a:t>2,365 units, 14.0 days of cover, demand of 169 units and a 7-day average of 78 all appear in the facts panel. If the model had made up a number, the template would have replaced this text.</a:t>
             </a:r>
             <a:endParaRPr sz="1400" b="0" i="0">
               <a:solidFill>
@@ -11791,7 +11791,7 @@
                 </a:solidFill>
                 <a:latin typeface="Calibri" panose="020F0502020204030204"/>
               </a:rPr>
-              <a:t>Policy comparison tab: 30 held-out seeds</a:t>
+              <a:t>Comparison tab: 30 unseen test runs</a:t>
             </a:r>
             <a:endParaRPr sz="1200" b="0" i="0">
               <a:solidFill>
@@ -11865,7 +11865,7 @@
                 </a:solidFill>
                 <a:latin typeface="Calibri" panose="020F0502020204030204"/>
               </a:rPr>
-              <a:t>Robustness tab: calm vs 6 unseen crises</a:t>
+              <a:t>Robustness tab: normal days vs 6 unseen crises</a:t>
             </a:r>
             <a:endParaRPr sz="1200" b="0" i="0">
               <a:solidFill>
@@ -11910,7 +11910,7 @@
                 </a:solidFill>
                 <a:latin typeface="Calibri" panose="020F0502020204030204"/>
               </a:rPr>
-              <a:t>•  Only the rows a claim depends on are shown: the four classical methods, the tuned, untuned and no-masking agents; then the engine, the tuned agent, and the curriculum agent beside its control.</a:t>
+              <a:t>•  Only the rows needed for our claims are shown: the 4 classical methods and 3 RL agents (tuned, untuned, no masking); then the engine, the tuned agent, and the crisis-trained agent beside its control.</a:t>
             </a:r>
             <a:endParaRPr sz="1400" b="0" i="0">
               <a:solidFill>
@@ -11932,7 +11932,7 @@
                 </a:solidFill>
                 <a:latin typeface="Calibri" panose="020F0502020204030204"/>
               </a:rPr>
-              <a:t>•  The headline cards give the numbers directly; the table below each chart is the same data for anyone who wants to check it.</a:t>
+              <a:t>•  The cards give the key numbers; the table under each chart has the same data for checking.</a:t>
             </a:r>
             <a:endParaRPr sz="1400" b="0" i="0">
               <a:solidFill>
@@ -12299,7 +12299,7 @@
                           </a:solidFill>
                           <a:latin typeface="Calibri" panose="020F0502020204030204"/>
                         </a:rPr>
-                        <a:t>Fill</a:t>
+                        <a:t>Served</a:t>
                       </a:r>
                       <a:endParaRPr sz="1200" b="1" i="0">
                         <a:solidFill>
@@ -12357,7 +12357,7 @@
                           </a:solidFill>
                           <a:latin typeface="Calibri" panose="020F0502020204030204"/>
                         </a:rPr>
-                        <a:t>Stockout</a:t>
+                        <a:t>Lost sales</a:t>
                       </a:r>
                       <a:endParaRPr sz="1200" b="1" i="0">
                         <a:solidFill>
@@ -13263,7 +13263,7 @@
                           </a:solidFill>
                           <a:latin typeface="Calibri" panose="020F0502020204030204"/>
                         </a:rPr>
-                        <a:t>Constant order (no system)</a:t>
+                        <a:t>Fixed daily order (no system)</a:t>
                       </a:r>
                       <a:endParaRPr sz="1200" b="0" i="0">
                         <a:solidFill>
@@ -13790,7 +13790,7 @@
                 </a:solidFill>
                 <a:latin typeface="Calibri" panose="020F0502020204030204"/>
               </a:rPr>
-              <a:t>gap per run, paired t = -6.45</a:t>
+              <a:t>gap per run (t = −6.45: a real gap)</a:t>
             </a:r>
             <a:endParaRPr sz="1300" b="0" i="0">
               <a:solidFill>
@@ -13835,7 +13835,7 @@
                 </a:solidFill>
                 <a:latin typeface="Calibri" panose="020F0502020204030204"/>
               </a:rPr>
-              <a:t>The best classical method beats the tuned agent, and the difference is real (95% CI 5.5–10.6 lakh), not chance. The agent beats two of the four classical methods: EOQ and (s,S).</a:t>
+              <a:t>The best classical method beats the tuned agent, and the gap is real, not luck (95% range: 5.5–10.6 lakh). The agent does beat two of the four classical methods: EOQ and (s,S).</a:t>
             </a:r>
             <a:endParaRPr sz="1500" b="0" i="0">
               <a:solidFill>
@@ -13857,7 +13857,7 @@
                 </a:solidFill>
                 <a:latin typeface="Calibri" panose="020F0502020204030204"/>
               </a:rPr>
-              <a:t>Mean profit per 180-day run, 30 held-out seeds. Rupees at 1 GBP = 105.</a:t>
+              <a:t>Average profit per 180-day run over 30 unseen test runs. Rupees at 1 GBP = 105.</a:t>
             </a:r>
             <a:endParaRPr sz="1200" b="0" i="0">
               <a:solidFill>
@@ -14785,7 +14785,7 @@
                           </a:solidFill>
                           <a:latin typeface="Calibri" panose="020F0502020204030204"/>
                         </a:rPr>
-                        <a:t>Train score</a:t>
+                        <a:t>Practice score</a:t>
                       </a:r>
                       <a:endParaRPr sz="1400" b="1" i="0">
                         <a:solidFill>
@@ -14873,7 +14873,7 @@
                           </a:solidFill>
                           <a:latin typeface="Calibri" panose="020F0502020204030204"/>
                         </a:rPr>
-                        <a:t>PPO, no masking</a:t>
+                        <a:t>Basic RL (no masking)</a:t>
                       </a:r>
                       <a:endParaRPr sz="1400" b="0" i="0">
                         <a:solidFill>
@@ -14990,7 +14990,7 @@
                           </a:solidFill>
                           <a:latin typeface="Calibri" panose="020F0502020204030204"/>
                         </a:rPr>
-                        <a:t>+ action masking</a:t>
+                        <a:t>+ masking (block bad choices)</a:t>
                       </a:r>
                       <a:endParaRPr sz="1400" b="0" i="0">
                         <a:solidFill>
@@ -15249,7 +15249,7 @@
                 </a:solidFill>
                 <a:latin typeface="Calibri" panose="020F0502020204030204"/>
               </a:rPr>
-              <a:t>•  Action masking: about 3×. </a:t>
+              <a:t>•  Masking: about 3×. </a:t>
             </a:r>
             <a:r>
               <a:rPr sz="1600" b="0" i="0">
@@ -15258,7 +15258,7 @@
                 </a:solidFill>
                 <a:latin typeface="Calibri" panose="020F0502020204030204"/>
               </a:rPr>
-              <a:t>Without it the agent spends most of training discovering that some choices are pointless.</a:t>
+              <a:t>Without it, the agent wastes most of its training on choices that can never work.</a:t>
             </a:r>
             <a:endParaRPr sz="1600" b="0" i="0">
               <a:solidFill>
@@ -15289,7 +15289,7 @@
                 </a:solidFill>
                 <a:latin typeface="Calibri" panose="020F0502020204030204"/>
               </a:rPr>
-              <a:t>From a 13.0 to an 8.1 lakh gap.</a:t>
+              <a:t>The gap shrank from 13.0 to 8.1 lakh.</a:t>
             </a:r>
             <a:endParaRPr sz="1600" b="0" i="0">
               <a:solidFill>
@@ -15311,7 +15311,7 @@
                 </a:solidFill>
                 <a:latin typeface="Calibri" panose="020F0502020204030204"/>
               </a:rPr>
-              <a:t>Train scores use checkpoint-selection seeds 900–905; test scores use the held-out seeds 500–529.</a:t>
+              <a:t>Practice scores use runs 900–905; test scores use unseen runs 500–529.</a:t>
             </a:r>
             <a:endParaRPr sz="1200" b="0" i="0">
               <a:solidFill>
@@ -15385,7 +15385,7 @@
                 </a:solidFill>
                 <a:latin typeface="Calibri" panose="020F0502020204030204"/>
               </a:rPr>
-              <a:t>Learning curves: no masking, masking, tuned (checkpoint seeds)</a:t>
+              <a:t>Learning curves: no masking, masking, tuned</a:t>
             </a:r>
             <a:endParaRPr sz="1200" b="0" i="0">
               <a:solidFill>
@@ -15627,7 +15627,7 @@
           <a:p>
             <a:r>
               <a:rPr sz="3200"/>
-              <a:t>Results (3/4): Robustness to Unseen Crises</a:t>
+              <a:t>Results (3/4): Coping with Unseen Crises</a:t>
             </a:r>
             <a:endParaRPr sz="3200"/>
           </a:p>
@@ -15722,7 +15722,7 @@
                           </a:solidFill>
                           <a:latin typeface="Calibri" panose="020F0502020204030204"/>
                         </a:rPr>
-                        <a:t>Calm</a:t>
+                        <a:t>Normal</a:t>
                       </a:r>
                       <a:endParaRPr sz="1400" b="1" i="0">
                         <a:solidFill>
@@ -16371,7 +16371,7 @@
                 </a:solidFill>
                 <a:latin typeface="Calibri" panose="020F0502020204030204"/>
               </a:rPr>
-              <a:t>•  Under crisis it earns ₹38.9 lakh vs the control’s ₹38.8 lakh</a:t>
+              <a:t>•  In a crisis it earns ₹38.9 lakh, same as the control’s ₹38.8 lakh</a:t>
             </a:r>
             <a:endParaRPr sz="1400" b="0" i="0">
               <a:solidFill>
@@ -16393,7 +16393,7 @@
                 </a:solidFill>
                 <a:latin typeface="Calibri" panose="020F0502020204030204"/>
               </a:rPr>
-              <a:t>•  but gave up ₹7.7 lakh of calm profit</a:t>
+              <a:t>•  and it lost ₹7.7 lakh of normal profit</a:t>
             </a:r>
             <a:endParaRPr sz="1400" b="0" i="0">
               <a:solidFill>
@@ -16415,7 +16415,7 @@
                 </a:solidFill>
                 <a:latin typeface="Calibri" panose="020F0502020204030204"/>
               </a:rPr>
-              <a:t>•  Paired t = +1.69: not significant</a:t>
+              <a:t>•  t = +1.69: not a real difference</a:t>
             </a:r>
             <a:endParaRPr sz="1400" b="0" i="0">
               <a:solidFill>
@@ -16460,7 +16460,7 @@
                 </a:solidFill>
                 <a:latin typeface="Calibri" panose="020F0502020204030204"/>
               </a:rPr>
-              <a:t>•  A smaller percentage drop is misleading </a:t>
+              <a:t>•  A smaller % drop can mislead </a:t>
             </a:r>
             <a:r>
               <a:rPr sz="1600" b="0" i="0">
@@ -16469,7 +16469,7 @@
                 </a:solidFill>
                 <a:latin typeface="Calibri" panose="020F0502020204030204"/>
               </a:rPr>
-              <a:t>when the base is lower: the crisis-trained agent drops less because it has less to lose. We show the drop beside absolute profit so “less to lose” cannot pass for robustness.</a:t>
+              <a:t>when the starting profit is lower: the crisis-trained agent drops less because it had less to lose. We show the drop next to the actual profit so we are not fooled.</a:t>
             </a:r>
             <a:endParaRPr sz="1600" b="0" i="0">
               <a:solidFill>
@@ -16500,7 +16500,7 @@
                 </a:solidFill>
                 <a:latin typeface="Calibri" panose="020F0502020204030204"/>
               </a:rPr>
-              <a:t>plain hyperparameter tuning made the agent more robust than crisis training did. The tuned agent never saw a crisis in training, yet has the highest crisis profit and smallest drop of all agent versions.</a:t>
+              <a:t>simply tuning the settings made the agent more crisis-proof than crisis training did. The tuned agent never trained on a crisis, yet has the highest crisis profit and the smallest drop of the agents.</a:t>
             </a:r>
             <a:endParaRPr sz="1600" b="0" i="0">
               <a:solidFill>
@@ -16522,7 +16522,7 @@
                 </a:solidFill>
                 <a:latin typeface="Calibri" panose="020F0502020204030204"/>
               </a:rPr>
-              <a:t>Limit: the crisis-trained agent faced a harder task with the same step budget, so under-training may explain part of its result.</a:t>
+              <a:t>Limit: the crisis-trained agent had a harder job with the same training time, so it may simply be under-trained.</a:t>
             </a:r>
             <a:endParaRPr sz="1300" b="0" i="0">
               <a:solidFill>
@@ -16894,7 +16894,7 @@
                 </a:solidFill>
                 <a:latin typeface="Calibri" panose="020F0502020204030204"/>
               </a:rPr>
-              <a:t>raw LLM accuracy: grounded and complete, before the check</a:t>
+              <a:t>raw LLM accuracy: correct and complete, before our check</a:t>
             </a:r>
             <a:endParaRPr sz="1300" b="0" i="0">
               <a:solidFill>
@@ -17007,7 +17007,7 @@
                 </a:solidFill>
                 <a:latin typeface="Calibri" panose="020F0502020204030204"/>
               </a:rPr>
-              <a:t>delivered accuracy: what the manager saw, after the check</a:t>
+              <a:t>delivered accuracy: what the manager actually saw</a:t>
             </a:r>
             <a:endParaRPr sz="1300" b="0" i="0">
               <a:solidFill>
@@ -17120,7 +17120,7 @@
                 </a:solidFill>
                 <a:latin typeface="Calibri" panose="020F0502020204030204"/>
               </a:rPr>
-              <a:t>raw outputs contained an invented number; all 5 caught</a:t>
+              <a:t>outputs had an invented number; all 5 caught</a:t>
             </a:r>
             <a:endParaRPr sz="1300" b="0" i="0">
               <a:solidFill>
@@ -17226,7 +17226,7 @@
                           </a:solidFill>
                           <a:latin typeface="Calibri" panose="020F0502020204030204"/>
                         </a:rPr>
-                        <a:t>LLM reachable (after retries)</a:t>
+                        <a:t>LLM answered (after retries)</a:t>
                       </a:r>
                       <a:endParaRPr sz="1400" b="0" i="0">
                         <a:solidFill>
@@ -17285,7 +17285,7 @@
                           </a:solidFill>
                           <a:latin typeface="Calibri" panose="020F0502020204030204"/>
                         </a:rPr>
-                        <a:t>Grounded (raw output used only real numbers)</a:t>
+                        <a:t>Only real numbers used (before the check)</a:t>
                       </a:r>
                       <a:endParaRPr sz="1400" b="0" i="0">
                         <a:solidFill>
@@ -17509,7 +17509,7 @@
                 </a:solidFill>
                 <a:latin typeface="Calibri" panose="020F0502020204030204"/>
               </a:rPr>
-              <a:t>•  The five bad outputs read fluently and confidently. A buyer would not have noticed.</a:t>
+              <a:t>•  The five bad outputs sounded confident and fluent. A buyer would not notice.</a:t>
             </a:r>
             <a:endParaRPr sz="1400" b="0" i="0">
               <a:solidFill>
@@ -17531,7 +17531,7 @@
                 </a:solidFill>
                 <a:latin typeface="Calibri" panose="020F0502020204030204"/>
               </a:rPr>
-              <a:t>•  Without the check, one explanation in six would carry a made-up figure.</a:t>
+              <a:t>•  Without the check, 1 explanation in 6 would contain a made-up number.</a:t>
             </a:r>
             <a:endParaRPr sz="1400" b="0" i="0">
               <a:solidFill>
@@ -17553,7 +17553,7 @@
                 </a:solidFill>
                 <a:latin typeface="Calibri" panose="020F0502020204030204"/>
               </a:rPr>
-              <a:t>•  An earlier metric scored only outputs that had already passed the check and reported 100% for a model that invented numbers 17% of the time. We replaced it with both numbers.</a:t>
+              <a:t>•  An earlier version only scored outputs that had already passed the check, so it showed 100% for a model that made up numbers 17% of the time. We now show both numbers.</a:t>
             </a:r>
             <a:endParaRPr sz="1400" b="0" i="0">
               <a:solidFill>
@@ -17925,7 +17925,7 @@
                 </a:solidFill>
                 <a:latin typeface="Calibri" panose="020F0502020204030204"/>
               </a:rPr>
-              <a:t>•  A complete system: simulator, RL agent, 4 tuned baselines, LLM explainer, crisis generator, dashboard</a:t>
+              <a:t>•  A complete system: simulator, RL agent, 4 tuned classical methods, LLM explainer, crisis generator, dashboard</a:t>
             </a:r>
             <a:endParaRPr sz="1600" b="0" i="0">
               <a:solidFill>
@@ -17947,7 +17947,7 @@
                 </a:solidFill>
                 <a:latin typeface="Calibri" panose="020F0502020204030204"/>
               </a:rPr>
-              <a:t>•  The tuned agent reaches 90.8% of the best classical profit and beats two of four classical methods; the gap is real (t = -6.45) and traced to supplier fragmentation</a:t>
+              <a:t>•  The tuned agent earns 90.8% of the best classical method and beats two of the four; the gap is real (t = -6.45) and comes from splitting orders across suppliers</a:t>
             </a:r>
             <a:endParaRPr sz="1600" b="0" i="0">
               <a:solidFill>
@@ -17991,7 +17991,7 @@
                 </a:solidFill>
                 <a:latin typeface="Calibri" panose="020F0502020204030204"/>
               </a:rPr>
-              <a:t>•  The explainer is only accurate because it is checked: 83% raw, 100% delivered</a:t>
+              <a:t>•  The explainer is accurate only because it is checked: 83% before, 100% after</a:t>
             </a:r>
             <a:endParaRPr sz="1600" b="0" i="0">
               <a:solidFill>
@@ -18013,7 +18013,7 @@
                 </a:solidFill>
                 <a:latin typeface="Calibri" panose="020F0502020204030204"/>
               </a:rPr>
-              <a:t>•  The honest deployment: classical engine decides, RL scored beside it, nothing executes</a:t>
+              <a:t>•  Safe way to use it: the classical engine decides, RL is scored alongside, nothing is executed</a:t>
             </a:r>
             <a:endParaRPr sz="1600" b="0" i="0">
               <a:solidFill>
@@ -18126,7 +18126,7 @@
                 </a:solidFill>
                 <a:latin typeface="Calibri" panose="020F0502020204030204"/>
               </a:rPr>
-              <a:t>•  Give the agent ordering memory (days since last order, last supplier, fees so far) and re-run on the same 30 seeds: the experiment most likely to close the gap</a:t>
+              <a:t>•  Give the agent a memory of its own orders (days since last order, last supplier, fees so far) and test again on the same 30 runs: the best chance to close the gap</a:t>
             </a:r>
             <a:endParaRPr sz="1600" b="0" i="0">
               <a:solidFill>
@@ -18148,7 +18148,7 @@
                 </a:solidFill>
                 <a:latin typeface="Calibri" panose="020F0502020204030204"/>
               </a:rPr>
-              <a:t>•  Test all methods under changed market conditions (more demand variation, longer delays) to show how rankings move</a:t>
+              <a:t>•  Test all methods when the market changes (wilder demand, longer delays)</a:t>
             </a:r>
             <a:endParaRPr sz="1600" b="0" i="0">
               <a:solidFill>
@@ -18170,7 +18170,7 @@
                 </a:solidFill>
                 <a:latin typeface="Calibri" panose="020F0502020204030204"/>
               </a:rPr>
-              <a:t>•  Longer crisis training, to separate under-training from a failed method</a:t>
+              <a:t>•  Train longer on crises, to see whether the method failed or was just under-trained</a:t>
             </a:r>
             <a:endParaRPr sz="1600" b="0" i="0">
               <a:solidFill>
@@ -18192,7 +18192,7 @@
                 </a:solidFill>
                 <a:latin typeface="Calibri" panose="020F0502020204030204"/>
               </a:rPr>
-              <a:t>•  Recent real data and real supplier terms if a partner can supply them</a:t>
+              <a:t>•  Use recent real data and real supplier terms if a partner can provide them</a:t>
             </a:r>
             <a:endParaRPr sz="1600" b="0" i="0">
               <a:solidFill>
@@ -18214,7 +18214,7 @@
                 </a:solidFill>
                 <a:latin typeface="Calibri" panose="020F0502020204030204"/>
               </a:rPr>
-              <a:t>•  Before any live use: new-product handling, order-value limits, an audit trail, a signal for when a human should decide</a:t>
+              <a:t>•  Before real use: handle new products, set order limits, keep an audit trail, and flag when a human should decide</a:t>
             </a:r>
             <a:endParaRPr sz="1600" b="0" i="0">
               <a:solidFill>
@@ -19247,7 +19247,7 @@
                 </a:solidFill>
                 <a:latin typeface="Calibri" panose="020F0502020204030204"/>
               </a:rPr>
-              <a:t>•  Money sits in the warehouse</a:t>
+              <a:t>•  Money is stuck in the warehouse</a:t>
             </a:r>
             <a:endParaRPr sz="1400" b="0" i="0">
               <a:solidFill>
@@ -19269,7 +19269,7 @@
                 </a:solidFill>
                 <a:latin typeface="Calibri" panose="020F0502020204030204"/>
               </a:rPr>
-              <a:t>•  Storage costs pile up</a:t>
+              <a:t>•  Storage costs keep adding up</a:t>
             </a:r>
             <a:endParaRPr sz="1400" b="0" i="0">
               <a:solidFill>
@@ -19291,7 +19291,7 @@
                 </a:solidFill>
                 <a:latin typeface="Calibri" panose="020F0502020204030204"/>
               </a:rPr>
-              <a:t>•  Seasonal goods are marked down</a:t>
+              <a:t>•  Seasonal goods lose value</a:t>
             </a:r>
             <a:endParaRPr sz="1400" b="0" i="0">
               <a:solidFill>
@@ -19404,7 +19404,7 @@
                 </a:solidFill>
                 <a:latin typeface="Calibri" panose="020F0502020204030204"/>
               </a:rPr>
-              <a:t>•  The customer buys elsewhere</a:t>
+              <a:t>•  The customer goes elsewhere</a:t>
             </a:r>
             <a:endParaRPr sz="1400" b="0" i="0">
               <a:solidFill>
@@ -19426,7 +19426,7 @@
                 </a:solidFill>
                 <a:latin typeface="Calibri" panose="020F0502020204030204"/>
               </a:rPr>
-              <a:t>•  The sale is gone for good</a:t>
+              <a:t>•  The sale is lost for good</a:t>
             </a:r>
             <a:endParaRPr sz="1400" b="0" i="0">
               <a:solidFill>
@@ -19448,7 +19448,7 @@
                 </a:solidFill>
                 <a:latin typeface="Calibri" panose="020F0502020204030204"/>
               </a:rPr>
-              <a:t>•  Lost-sale penalty applies</a:t>
+              <a:t>•  We also pay a penalty</a:t>
             </a:r>
             <a:endParaRPr sz="1400" b="0" i="0">
               <a:solidFill>
@@ -19583,7 +19583,7 @@
                 </a:solidFill>
                 <a:latin typeface="Calibri" panose="020F0502020204030204"/>
               </a:rPr>
-              <a:t>•  Fast but expensive</a:t>
+              <a:t>•  Fast but costly</a:t>
             </a:r>
             <a:endParaRPr sz="1400" b="0" i="0">
               <a:solidFill>
@@ -19605,7 +19605,7 @@
                 </a:solidFill>
                 <a:latin typeface="Calibri" panose="020F0502020204030204"/>
               </a:rPr>
-              <a:t>•  Reasonable but ships only 80%</a:t>
+              <a:t>•  Looks fine but ships only 80%</a:t>
             </a:r>
             <a:endParaRPr sz="1400" b="0" i="0">
               <a:solidFill>
@@ -19650,7 +19650,7 @@
                 </a:solidFill>
                 <a:latin typeface="Calibri" panose="020F0502020204030204"/>
               </a:rPr>
-              <a:t>•  A sequential problem. </a:t>
+              <a:t>•  A chain of decisions. </a:t>
             </a:r>
             <a:r>
               <a:rPr sz="1800" b="0" i="0">
@@ -19659,7 +19659,7 @@
                 </a:solidFill>
                 <a:latin typeface="Calibri" panose="020F0502020204030204"/>
               </a:rPr>
-              <a:t>Today’s order becomes next week’s stock, so what you do now changes what you can do later.</a:t>
+              <a:t>Today’s order becomes next week’s stock, so every choice affects the next ones.</a:t>
             </a:r>
             <a:endParaRPr sz="1800" b="0" i="0">
               <a:solidFill>
@@ -19681,7 +19681,7 @@
                 </a:solidFill>
                 <a:latin typeface="Calibri" panose="020F0502020204030204"/>
               </a:rPr>
-              <a:t>•  Classical rules struggle. </a:t>
+              <a:t>•  Old rules fall short. </a:t>
             </a:r>
             <a:r>
               <a:rPr sz="1800" b="0" i="0">
@@ -19690,7 +19690,7 @@
                 </a:solidFill>
                 <a:latin typeface="Calibri" panose="020F0502020204030204"/>
               </a:rPr>
-              <a:t>(s,S), EOQ, newsvendor and forecast + safety stock treat each product alone and assume well-behaved demand. In our data, daily demand varies about 216× more than a Poisson model allows.</a:t>
+              <a:t>Textbook rules (like (s,S) and EOQ) look at each product alone and expect steady demand. In our data, daily demand swings about 216× more than a simple model expects.</a:t>
             </a:r>
             <a:endParaRPr sz="1800" b="0" i="0">
               <a:solidFill>
@@ -19712,7 +19712,7 @@
                 </a:solidFill>
                 <a:latin typeface="Calibri" panose="020F0502020204030204"/>
               </a:rPr>
-              <a:t>•  Our hypothesis. </a:t>
+              <a:t>•  Our idea. </a:t>
             </a:r>
             <a:r>
               <a:rPr sz="1800" b="0" i="0">
@@ -19721,7 +19721,7 @@
                 </a:solidFill>
                 <a:latin typeface="Calibri" panose="020F0502020204030204"/>
               </a:rPr>
-              <a:t>RL can learn a joint ordering and sourcing policy that adapts to season, volatility and supplier state, which a formula cannot.</a:t>
+              <a:t>A reinforcement learning (RL) agent can learn when to order and from whom, and adapt to the season and to supplier problems, which a fixed formula cannot.</a:t>
             </a:r>
             <a:endParaRPr sz="1800" b="0" i="0">
               <a:solidFill>
@@ -19743,7 +19743,7 @@
                 </a:solidFill>
                 <a:latin typeface="Calibri" panose="020F0502020204030204"/>
               </a:rPr>
-              <a:t>•  But trust matters. </a:t>
+              <a:t>•  Trust matters. </a:t>
             </a:r>
             <a:r>
               <a:rPr sz="1800" b="0" i="0">
@@ -19752,7 +19752,7 @@
                 </a:solidFill>
                 <a:latin typeface="Calibri" panose="020F0502020204030204"/>
               </a:rPr>
-              <a:t>A manager will not act on a number they cannot understand, so an LLM explains the situation behind every order, with every number checked.</a:t>
+              <a:t>A manager will not follow a number they cannot understand. So a language model (LLM) explains each order in plain words, and every number it quotes is checked.</a:t>
             </a:r>
             <a:endParaRPr sz="1800" b="0" i="0">
               <a:solidFill>
@@ -20058,7 +20058,7 @@
                           </a:solidFill>
                           <a:latin typeface="Calibri" panose="020F0502020204030204"/>
                         </a:rPr>
-                        <a:t>The task</a:t>
+                        <a:t>What</a:t>
                       </a:r>
                       <a:endParaRPr sz="1400" b="1" i="0">
                         <a:solidFill>
@@ -20087,7 +20087,7 @@
                           </a:solidFill>
                           <a:latin typeface="Calibri" panose="020F0502020204030204"/>
                         </a:rPr>
-                        <a:t>Definition</a:t>
+                        <a:t>Details</a:t>
                       </a:r>
                       <a:endParaRPr sz="1400" b="1" i="0">
                         <a:solidFill>
@@ -20145,7 +20145,7 @@
                           </a:solidFill>
                           <a:latin typeface="Calibri" panose="020F0502020204030204"/>
                         </a:rPr>
-                        <a:t>10 real products (UCI Online Retail II)</a:t>
+                        <a:t>10 real products from a UK shop’s sales data</a:t>
                       </a:r>
                       <a:endParaRPr sz="1400" b="0" i="0">
                         <a:solidFill>
@@ -20203,7 +20203,7 @@
                           </a:solidFill>
                           <a:latin typeface="Calibri" panose="020F0502020204030204"/>
                         </a:rPr>
-                        <a:t>3, invented: no public dataset has supplier terms</a:t>
+                        <a:t>3, made up by us (no public data on suppliers)</a:t>
                       </a:r>
                       <a:endParaRPr sz="1400" b="0" i="0">
                         <a:solidFill>
@@ -20261,7 +20261,7 @@
                           </a:solidFill>
                           <a:latin typeface="Calibri" panose="020F0502020204030204"/>
                         </a:rPr>
-                        <a:t>180 simulated days; first 14 are warm-up, not scored</a:t>
+                        <a:t>180 days per run; the first 14 days are a warm-up and not counted</a:t>
                       </a:r>
                       <a:endParaRPr sz="1400" b="0" i="0">
                         <a:solidFill>
@@ -20319,7 +20319,7 @@
                           </a:solidFill>
                           <a:latin typeface="Calibri" panose="020F0502020204030204"/>
                         </a:rPr>
-                        <a:t>one shared store of 20,000 units; overflow is refused</a:t>
+                        <a:t>one shared store, 20,000 units; extra goods are turned away</a:t>
                       </a:r>
                       <a:endParaRPr sz="1400" b="0" i="0">
                         <a:solidFill>
@@ -20377,7 +20377,7 @@
                           </a:solidFill>
                           <a:latin typeface="Calibri" panose="020F0502020204030204"/>
                         </a:rPr>
-                        <a:t>each day, each product: 7 quantity levels × 3 suppliers = 21 options</a:t>
+                        <a:t>every day, for each product: 7 quantities × 3 suppliers = 21 choices</a:t>
                       </a:r>
                       <a:endParaRPr sz="1400" b="0" i="0">
                         <a:solidFill>
@@ -20435,7 +20435,7 @@
                           </a:solidFill>
                           <a:latin typeface="Calibri" panose="020F0502020204030204"/>
                         </a:rPr>
-                        <a:t>maximise profit = sales − purchases − storage − fees − stockout − overflow</a:t>
+                        <a:t>maximise profit = sales − purchases − storage − fees − lost sales − wasted goods</a:t>
                       </a:r>
                       <a:endParaRPr sz="1400" b="0" i="0">
                         <a:solidFill>
@@ -20553,7 +20553,7 @@
                           </a:solidFill>
                           <a:latin typeface="Calibri" panose="020F0502020204030204"/>
                         </a:rPr>
-                        <a:t>Lead time</a:t>
+                        <a:t>Delivery</a:t>
                       </a:r>
                       <a:endParaRPr sz="1300" b="1" i="0">
                         <a:solidFill>
@@ -20582,7 +20582,7 @@
                           </a:solidFill>
                           <a:latin typeface="Calibri" panose="020F0502020204030204"/>
                         </a:rPr>
-                        <a:t>Ships</a:t>
+                        <a:t>Delivers</a:t>
                       </a:r>
                       <a:endParaRPr sz="1300" b="1" i="0">
                         <a:solidFill>
@@ -21104,7 +21104,7 @@
                 </a:solidFill>
                 <a:latin typeface="Calibri" panose="020F0502020204030204"/>
               </a:rPr>
-              <a:t>None is best: the cheap one ties up a week of stock in transit, the fast one eats margin, the middle one is unreliable.</a:t>
+              <a:t>No supplier is best: the cheap one is slow, the fast one costs more, and the middle one is unreliable.</a:t>
             </a:r>
             <a:endParaRPr sz="1400" b="0" i="0">
               <a:solidFill>
@@ -21217,7 +21217,7 @@
                 </a:solidFill>
                 <a:latin typeface="Calibri" panose="020F0502020204030204"/>
               </a:rPr>
-              <a:t>possible order combinations every day (21¹⁰)</a:t>
+              <a:t>different order combinations every day</a:t>
             </a:r>
             <a:endParaRPr sz="1300" b="0" i="0">
               <a:solidFill>
@@ -21330,7 +21330,7 @@
                 </a:solidFill>
                 <a:latin typeface="Calibri" panose="020F0502020204030204"/>
               </a:rPr>
-              <a:t>variance of daily demand vs its mean</a:t>
+              <a:t>how much more daily demand swings than a simple model expects</a:t>
             </a:r>
             <a:endParaRPr sz="1300" b="0" i="0">
               <a:solidFill>
@@ -21443,7 +21443,7 @@
                 </a:solidFill>
                 <a:latin typeface="Calibri" panose="020F0502020204030204"/>
               </a:rPr>
-              <a:t>quantity and supplier decided together</a:t>
+              <a:t>quantity and supplier are chosen together</a:t>
             </a:r>
             <a:endParaRPr sz="1300" b="0" i="0">
               <a:solidFill>
@@ -21954,7 +21954,7 @@
                           </a:solidFill>
                           <a:latin typeface="Calibri" panose="020F0502020204030204"/>
                         </a:rPr>
-                        <a:t>Clipped surrogate policy gradient</a:t>
+                        <a:t>A stable way to train an RL agent</a:t>
                       </a:r>
                       <a:endParaRPr sz="1300" b="0" i="0">
                         <a:solidFill>
@@ -21982,7 +21982,7 @@
                           </a:solidFill>
                           <a:latin typeface="Calibri" panose="020F0502020204030204"/>
                         </a:rPr>
-                        <a:t>Stable, sample-efficient default RL baseline</a:t>
+                        <a:t>Reliable; a common default</a:t>
                       </a:r>
                       <a:endParaRPr sz="1300" b="0" i="0">
                         <a:solidFill>
@@ -22010,7 +22010,7 @@
                           </a:solidFill>
                           <a:latin typeface="Calibri" panose="020F0502020204030204"/>
                         </a:rPr>
-                        <a:t>General purpose; no supply-chain structure</a:t>
+                        <a:t>General purpose; not built for supply chains</a:t>
                       </a:r>
                       <a:endParaRPr sz="1300" b="0" i="0">
                         <a:solidFill>
@@ -22096,7 +22096,7 @@
                           </a:solidFill>
                           <a:latin typeface="Calibri" panose="020F0502020204030204"/>
                         </a:rPr>
-                        <a:t>DQN on a serial chain</a:t>
+                        <a:t>Deep RL on a simple supply chain</a:t>
                       </a:r>
                       <a:endParaRPr sz="1300" b="0" i="0">
                         <a:solidFill>
@@ -22124,7 +22124,7 @@
                           </a:solidFill>
                           <a:latin typeface="Calibri" panose="020F0502020204030204"/>
                         </a:rPr>
-                        <a:t>DRL matches or beats base-stock under cooperation</a:t>
+                        <a:t>Matches or beats standard ordering rules when teams cooperate</a:t>
                       </a:r>
                       <a:endParaRPr sz="1300" b="0" i="0">
                         <a:solidFill>
@@ -22152,7 +22152,7 @@
                           </a:solidFill>
                           <a:latin typeface="Calibri" panose="020F0502020204030204"/>
                         </a:rPr>
-                        <a:t>Single product, serial chain, no sourcing choice</a:t>
+                        <a:t>One product, no supplier choice</a:t>
                       </a:r>
                       <a:endParaRPr sz="1300" b="0" i="0">
                         <a:solidFill>
@@ -22238,7 +22238,7 @@
                           </a:solidFill>
                           <a:latin typeface="Calibri" panose="020F0502020204030204"/>
                         </a:rPr>
-                        <a:t>A3C on lost-sales and dual-sourcing</a:t>
+                        <a:t>Deep RL on lost sales and two suppliers</a:t>
                       </a:r>
                       <a:endParaRPr sz="1300" b="0" i="0">
                         <a:solidFill>
@@ -22266,7 +22266,7 @@
                           </a:solidFill>
                           <a:latin typeface="Calibri" panose="020F0502020204030204"/>
                         </a:rPr>
-                        <a:t>Competitive with tuned heuristics, not clearly superior</a:t>
+                        <a:t>As good as well-tuned rules, not clearly better</a:t>
                       </a:r>
                       <a:endParaRPr sz="1300" b="0" i="0">
                         <a:solidFill>
@@ -22294,7 +22294,7 @@
                           </a:solidFill>
                           <a:latin typeface="Calibri" panose="020F0502020204030204"/>
                         </a:rPr>
-                        <a:t>Heavy tuning cost; no explanation layer</a:t>
+                        <a:t>Needs a lot of tuning; no explanations</a:t>
                       </a:r>
                       <a:endParaRPr sz="1300" b="0" i="0">
                         <a:solidFill>
@@ -22380,7 +22380,7 @@
                           </a:solidFill>
                           <a:latin typeface="Calibri" panose="020F0502020204030204"/>
                         </a:rPr>
-                        <a:t>Survey and roadmap</a:t>
+                        <a:t>Survey of the field</a:t>
                       </a:r>
                       <a:endParaRPr sz="1300" b="0" i="0">
                         <a:solidFill>
@@ -22408,7 +22408,7 @@
                           </a:solidFill>
                           <a:latin typeface="Calibri" panose="020F0502020204030204"/>
                         </a:rPr>
-                        <a:t>Names fair benchmarking and interpretability as open problems</a:t>
+                        <a:t>Says fair comparisons and explanations are still open problems</a:t>
                       </a:r>
                       <a:endParaRPr sz="1300" b="0" i="0">
                         <a:solidFill>
@@ -22436,7 +22436,7 @@
                           </a:solidFill>
                           <a:latin typeface="Calibri" panose="020F0502020204030204"/>
                         </a:rPr>
-                        <a:t>Conceptual; no implementation</a:t>
+                        <a:t>Ideas only; no experiments</a:t>
                       </a:r>
                       <a:endParaRPr sz="1300" b="0" i="0">
                         <a:solidFill>
@@ -22522,7 +22522,7 @@
                           </a:solidFill>
                           <a:latin typeface="Calibri" panose="020F0502020204030204"/>
                         </a:rPr>
-                        <a:t>Masking in policy gradients</a:t>
+                        <a:t>Blocking impossible actions during training</a:t>
                       </a:r>
                       <a:endParaRPr sz="1300" b="0" i="0">
                         <a:solidFill>
@@ -22550,7 +22550,7 @@
                           </a:solidFill>
                           <a:latin typeface="Calibri" panose="020F0502020204030204"/>
                         </a:rPr>
-                        <a:t>Masking is a valid gradient and scales to large action spaces</a:t>
+                        <a:t>Works well even with very many actions</a:t>
                       </a:r>
                       <a:endParaRPr sz="1300" b="0" i="0">
                         <a:solidFill>
@@ -22578,7 +22578,7 @@
                           </a:solidFill>
                           <a:latin typeface="Calibri" panose="020F0502020204030204"/>
                         </a:rPr>
-                        <a:t>Not shown on inventory or sourcing</a:t>
+                        <a:t>Not tried on inventory</a:t>
                       </a:r>
                       <a:endParaRPr sz="1300" b="0" i="0">
                         <a:solidFill>
@@ -22951,7 +22951,7 @@
                 </a:solidFill>
                 <a:latin typeface="Calibri" panose="020F0502020204030204"/>
               </a:rPr>
-              <a:t>Narrow problem settings</a:t>
+              <a:t>Problems are too simple</a:t>
             </a:r>
             <a:endParaRPr sz="1700" b="1" i="0">
               <a:solidFill>
@@ -22973,7 +22973,7 @@
                 </a:solidFill>
                 <a:latin typeface="Calibri" panose="020F0502020204030204"/>
               </a:rPr>
-              <a:t>Single-product or serial chains dominate; joint quantity and supplier choice under one shared capacity is rarely modelled.</a:t>
+              <a:t>Most studies use one product or a simple chain. Choosing quantity and supplier together, with one shared warehouse, is rarely studied.</a:t>
             </a:r>
             <a:endParaRPr sz="1400" b="0" i="0">
               <a:solidFill>
@@ -23086,7 +23086,7 @@
                 </a:solidFill>
                 <a:latin typeface="Calibri" panose="020F0502020204030204"/>
               </a:rPr>
-              <a:t>We model 10 products, 3 suppliers and one shared warehouse, with a joint action.</a:t>
+              <a:t>We model 10 products, 3 suppliers and one shared warehouse, and choose both together.</a:t>
             </a:r>
             <a:endParaRPr sz="1400" b="0" i="0">
               <a:solidFill>
@@ -23190,7 +23190,7 @@
                 </a:solidFill>
                 <a:latin typeface="Calibri" panose="020F0502020204030204"/>
               </a:rPr>
-              <a:t>Explainability is deferred</a:t>
+              <a:t>No explanations</a:t>
             </a:r>
             <a:endParaRPr sz="1700" b="1" i="0">
               <a:solidFill>
@@ -23212,7 +23212,7 @@
                 </a:solidFill>
                 <a:latin typeface="Calibri" panose="020F0502020204030204"/>
               </a:rPr>
-              <a:t>Learned policies output a number, not a reason, so they stay in simulation.</a:t>
+              <a:t>A learned agent gives a number, not a reason, so it stays in simulation.</a:t>
             </a:r>
             <a:endParaRPr sz="1400" b="0" i="0">
               <a:solidFill>
@@ -23325,7 +23325,7 @@
                 </a:solidFill>
                 <a:latin typeface="Calibri" panose="020F0502020204030204"/>
               </a:rPr>
-              <a:t>An LLM explains each decision from computed facts; every number is checked.</a:t>
+              <a:t>An LLM explains each decision using facts from the simulator, and every number is checked.</a:t>
             </a:r>
             <a:endParaRPr sz="1400" b="0" i="0">
               <a:solidFill>
@@ -23429,7 +23429,7 @@
                 </a:solidFill>
                 <a:latin typeface="Calibri" panose="020F0502020204030204"/>
               </a:rPr>
-              <a:t>Stress testing is hand-built</a:t>
+              <a:t>Stress tests are made by hand</a:t>
             </a:r>
             <a:endParaRPr sz="1700" b="1" i="0">
               <a:solidFill>
@@ -23451,7 +23451,7 @@
                 </a:solidFill>
                 <a:latin typeface="Calibri" panose="020F0502020204030204"/>
               </a:rPr>
-              <a:t>Spikes and failures are coded case by case, so coverage is narrow.</a:t>
+              <a:t>Crises are coded one by one, so only a few are ever tested.</a:t>
             </a:r>
             <a:endParaRPr sz="1400" b="0" i="0">
               <a:solidFill>
@@ -23564,7 +23564,7 @@
                 </a:solidFill>
                 <a:latin typeface="Calibri" panose="020F0502020204030204"/>
               </a:rPr>
-              <a:t>An LLM writes overlapping crises; each is validated and clamped before use.</a:t>
+              <a:t>An LLM writes crises that overlap; each is checked and kept within safe ranges.</a:t>
             </a:r>
             <a:endParaRPr sz="1400" b="0" i="0">
               <a:solidFill>
@@ -23668,7 +23668,7 @@
                 </a:solidFill>
                 <a:latin typeface="Calibri" panose="020F0502020204030204"/>
               </a:rPr>
-              <a:t>Weak baselines</a:t>
+              <a:t>Weak comparisons</a:t>
             </a:r>
             <a:endParaRPr sz="1700" b="1" i="0">
               <a:solidFill>
@@ -23690,7 +23690,7 @@
                 </a:solidFill>
                 <a:latin typeface="Calibri" panose="020F0502020204030204"/>
               </a:rPr>
-              <a:t>Baselines are often left untuned, so a new method “wins” for free.</a:t>
+              <a:t>Old rules are often left untuned, so a new method looks good for free.</a:t>
             </a:r>
             <a:endParaRPr sz="1400" b="0" i="0">
               <a:solidFill>
@@ -23803,7 +23803,7 @@
                 </a:solidFill>
                 <a:latin typeface="Calibri" panose="020F0502020204030204"/>
               </a:rPr>
-              <a:t>All four classical methods are tuned on separate seeds before any comparison.</a:t>
+              <a:t>We tuned all four classical methods first, on separate test runs.</a:t>
             </a:r>
             <a:endParaRPr sz="1400" b="0" i="0">
               <a:solidFill>
@@ -24256,7 +24256,7 @@
                           </a:solidFill>
                           <a:latin typeface="Calibri" panose="020F0502020204030204"/>
                         </a:rPr>
-                        <a:t>Build a supply chain simulation from real data</a:t>
+                        <a:t>Build a supply-chain simulation from real data</a:t>
                       </a:r>
                       <a:endParaRPr sz="1400" b="0" i="0">
                         <a:solidFill>
@@ -24314,7 +24314,7 @@
                           </a:solidFill>
                           <a:latin typeface="Calibri" panose="020F0502020204030204"/>
                         </a:rPr>
-                        <a:t>1.07M records calibrate it; sensible rules profit, silly ones lose</a:t>
+                        <a:t>Built from 1.07M real sales; sensible ordering earns profit, silly ordering loses</a:t>
                       </a:r>
                       <a:endParaRPr sz="1400" b="0" i="0">
                         <a:solidFill>
@@ -24430,7 +24430,7 @@
                           </a:solidFill>
                           <a:latin typeface="Calibri" panose="020F0502020204030204"/>
                         </a:rPr>
-                        <a:t>MaskablePPO, tuned, 2M steps; 90.8% of the best classical method</a:t>
+                        <a:t>Tuned agent, 2M training steps; earns 90.8% of the best classical method</a:t>
                       </a:r>
                       <a:endParaRPr sz="1400" b="0" i="0">
                         <a:solidFill>
@@ -24488,7 +24488,7 @@
                           </a:solidFill>
                           <a:latin typeface="Calibri" panose="020F0502020204030204"/>
                         </a:rPr>
-                        <a:t>LLM explains each decision in business language</a:t>
+                        <a:t>LLM explains each decision in plain business language</a:t>
                       </a:r>
                       <a:endParaRPr sz="1400" b="0" i="0">
                         <a:solidFill>
@@ -24546,7 +24546,7 @@
                           </a:solidFill>
                           <a:latin typeface="Calibri" panose="020F0502020204030204"/>
                         </a:rPr>
-                        <a:t>100% delivered accuracy; 83% raw, the check caught every invented number</a:t>
+                        <a:t>100% of explanations shown were correct; 83% before our check, which caught every invented number</a:t>
                       </a:r>
                       <a:endParaRPr sz="1400" b="0" i="0">
                         <a:solidFill>
@@ -24604,7 +24604,7 @@
                           </a:solidFill>
                           <a:latin typeface="Calibri" panose="020F0502020204030204"/>
                         </a:rPr>
-                        <a:t>LLM generates demand-spike and supplier-delay scenarios</a:t>
+                        <a:t>LLM creates demand-spike and supplier-delay scenarios</a:t>
                       </a:r>
                       <a:endParaRPr sz="1400" b="0" i="0">
                         <a:solidFill>
@@ -24662,7 +24662,7 @@
                           </a:solidFill>
                           <a:latin typeface="Calibri" panose="020F0502020204030204"/>
                         </a:rPr>
-                        <a:t>6 unseen crises used for testing; curriculum training tested</a:t>
+                        <a:t>6 unseen crises used for testing; crisis training also tried</a:t>
                       </a:r>
                       <a:endParaRPr sz="1400" b="0" i="0">
                         <a:solidFill>
@@ -24778,7 +24778,7 @@
                           </a:solidFill>
                           <a:latin typeface="Calibri" panose="020F0502020204030204"/>
                         </a:rPr>
-                        <a:t>30 held-out seeds, paired t-test: the classical method still wins</a:t>
+                        <a:t>30 unseen test runs: the classical method still wins</a:t>
                       </a:r>
                       <a:endParaRPr sz="1400" b="0" i="0">
                         <a:solidFill>
@@ -24842,7 +24842,7 @@
                 </a:solidFill>
                 <a:latin typeface="Calibri" panose="020F0502020204030204"/>
               </a:rPr>
-              <a:t>The comparison came out against the AI, and we report it that way: the claim we can defend is that RL reaches 90.8% of a strong tuned baseline, with a measured reason for the gap.</a:t>
+              <a:t>The result went against the AI, and we say so. What we can defend: RL reaches 90.8% of a strong, well-tuned baseline, and we know why it falls short.</a:t>
             </a:r>
             <a:endParaRPr sz="1700" b="0" i="0">
               <a:solidFill>
@@ -25521,7 +25521,7 @@
                 </a:solidFill>
                 <a:latin typeface="Calibri" panose="020F0502020204030204"/>
               </a:rPr>
-              <a:t>•  Best score without it: ₹24.9 lakh</a:t>
+              <a:t>•  Masking blocks impossible choices first</a:t>
             </a:r>
             <a:endParaRPr sz="1400" b="0" i="0">
               <a:solidFill>
@@ -25543,7 +25543,7 @@
                 </a:solidFill>
                 <a:latin typeface="Calibri" panose="020F0502020204030204"/>
               </a:rPr>
-              <a:t>•  With it: ₹76.4 lakh, about 3×</a:t>
+              <a:t>•  Score: ₹24.9 lakh → ₹76.4 lakh (3×)</a:t>
             </a:r>
             <a:endParaRPr sz="1400" b="0" i="0">
               <a:solidFill>
@@ -25634,7 +25634,7 @@
                 </a:solidFill>
                 <a:latin typeface="Calibri" panose="020F0502020204030204"/>
               </a:rPr>
-              <a:t>Why a joint action</a:t>
+              <a:t>Why one joint choice</a:t>
             </a:r>
             <a:endParaRPr sz="1700" b="1" i="0">
               <a:solidFill>
@@ -25656,7 +25656,7 @@
                 </a:solidFill>
                 <a:latin typeface="Calibri" panose="020F0502020204030204"/>
               </a:rPr>
-              <a:t>•  Quantity and supplier as one choice</a:t>
+              <a:t>•  Quantity and supplier chosen together</a:t>
             </a:r>
             <a:endParaRPr sz="1400" b="0" i="0">
               <a:solidFill>
@@ -25678,7 +25678,7 @@
                 </a:solidFill>
                 <a:latin typeface="Calibri" panose="020F0502020204030204"/>
               </a:rPr>
-              <a:t>•  2.8× faster training, matches reality</a:t>
+              <a:t>•  Trains 2.8× faster, fits real life</a:t>
             </a:r>
             <a:endParaRPr sz="1400" b="0" i="0">
               <a:solidFill>
@@ -25791,7 +25791,7 @@
                 </a:solidFill>
                 <a:latin typeface="Calibri" panose="020F0502020204030204"/>
               </a:rPr>
-              <a:t>•  8 settings tried, best 2 run to 2M steps</a:t>
+              <a:t>•  Tried 8 settings, ran the best 2 longer</a:t>
             </a:r>
             <a:endParaRPr sz="1400" b="0" i="0">
               <a:solidFill>
@@ -25813,7 +25813,7 @@
                 </a:solidFill>
                 <a:latin typeface="Calibri" panose="020F0502020204030204"/>
               </a:rPr>
-              <a:t>•  The lowest learning rate won</a:t>
+              <a:t>•  A slower learning rate worked best</a:t>
             </a:r>
             <a:endParaRPr sz="1400" b="0" i="0">
               <a:solidFill>
